--- a/PatientTriage_AI_Business_Proposal.pptx
+++ b/PatientTriage_AI_Business_Proposal.pptx
@@ -9,9 +9,6 @@
     <p:sldId id="257" r:id="rId8"/>
     <p:sldId id="258" r:id="rId9"/>
     <p:sldId id="259" r:id="rId10"/>
-    <p:sldId id="260" r:id="rId11"/>
-    <p:sldId id="261" r:id="rId12"/>
-    <p:sldId id="262" r:id="rId13"/>
   </p:sldIdLst>
   <p:sldSz cx="12191695" cy="6858000" type="screen4x3"/>
   <p:notesSz cx="6858000" cy="9144000"/>
@@ -3109,7 +3106,7 @@
             <a:avLst/>
           </a:prstGeom>
           <a:solidFill>
-            <a:srgbClr val="0F172A"/>
+            <a:srgbClr val="FFFFFF"/>
           </a:solidFill>
           <a:ln>
             <a:noFill/>
@@ -3145,8 +3142,8 @@
         </p:nvSpPr>
         <p:spPr>
           <a:xfrm>
-            <a:off x="731520" y="1371600"/>
-            <a:ext cx="10698480" cy="2743200"/>
+            <a:off x="731520" y="548640"/>
+            <a:ext cx="10698480" cy="731520"/>
           </a:xfrm>
           <a:prstGeom prst="rect">
             <a:avLst/>
@@ -3154,70 +3151,40 @@
           <a:noFill/>
         </p:spPr>
         <p:txBody>
-          <a:bodyPr wrap="square">
+          <a:bodyPr wrap="none">
             <a:spAutoFit/>
           </a:bodyPr>
           <a:lstStyle/>
           <a:p>
             <a:pPr>
-              <a:defRPr sz="4400" b="1">
+              <a:defRPr sz="3600" b="1">
                 <a:solidFill>
-                  <a:srgbClr val="FFFFFF"/>
+                  <a:srgbClr val="0F172A"/>
                 </a:solidFill>
               </a:defRPr>
             </a:pPr>
             <a:r>
-              <a:t>PATIENTTRIAGE.AI</a:t>
-            </a:r>
-          </a:p>
-          <a:p>
-            <a:pPr>
-              <a:spcBef>
-                <a:spcPts val="1000"/>
-              </a:spcBef>
-              <a:defRPr sz="2400" b="1">
-                <a:solidFill>
-                  <a:srgbClr val="0284C7"/>
-                </a:solidFill>
-              </a:defRPr>
-            </a:pPr>
-            <a:r>
-              <a:t>“Triage is a snapshot. Risk isn't.”</a:t>
-            </a:r>
-          </a:p>
-          <a:p>
-            <a:pPr>
-              <a:spcBef>
-                <a:spcPts val="600"/>
-              </a:spcBef>
-              <a:defRPr sz="1600">
-                <a:solidFill>
-                  <a:srgbClr val="94A3B8"/>
-                </a:solidFill>
-              </a:defRPr>
-            </a:pPr>
-            <a:r>
-              <a:t>The Active Autonomous Emergency Department Safety Control Tower</a:t>
-            </a:r>
-          </a:p>
-        </p:txBody>
-      </p:sp>
-      <p:sp>
-        <p:nvSpPr>
-          <p:cNvPr id="4" name="Rounded Rectangle 3"/>
+              <a:t>Team details</a:t>
+            </a:r>
+          </a:p>
+        </p:txBody>
+      </p:sp>
+      <p:sp>
+        <p:nvSpPr>
+          <p:cNvPr id="4" name="Rectangle 3"/>
           <p:cNvSpPr/>
           <p:nvPr/>
         </p:nvSpPr>
         <p:spPr>
           <a:xfrm>
-            <a:off x="731520" y="4389120"/>
-            <a:ext cx="2468880" cy="1645920"/>
+            <a:off x="731520" y="1371600"/>
+            <a:ext cx="10728655" cy="411480"/>
           </a:xfrm>
-          <a:prstGeom prst="roundRect">
+          <a:prstGeom prst="rect">
             <a:avLst/>
           </a:prstGeom>
           <a:solidFill>
-            <a:srgbClr val="1E293B"/>
+            <a:srgbClr val="F3E8FF"/>
           </a:solidFill>
           <a:ln>
             <a:noFill/>
@@ -3241,7 +3208,16 @@
           <a:bodyPr rtlCol="0" anchor="ctr"/>
           <a:lstStyle/>
           <a:p>
-            <a:pPr algn="ctr"/>
+            <a:pPr algn="ctr">
+              <a:defRPr sz="1300" b="1">
+                <a:solidFill>
+                  <a:srgbClr val="A800FF"/>
+                </a:solidFill>
+              </a:defRPr>
+            </a:pPr>
+            <a:r>
+              <a:t> TEAM NAME: Phoenix</a:t>
+            </a:r>
           </a:p>
         </p:txBody>
       </p:sp>
@@ -3253,8 +3229,8 @@
         </p:nvSpPr>
         <p:spPr>
           <a:xfrm>
-            <a:off x="868680" y="4480560"/>
-            <a:ext cx="2194560" cy="1463040"/>
+            <a:off x="2926080" y="2103120"/>
+            <a:ext cx="8229600" cy="4114800"/>
           </a:xfrm>
           <a:prstGeom prst="rect">
             <a:avLst/>
@@ -3268,64 +3244,87 @@
           <a:lstStyle/>
           <a:p>
             <a:pPr>
-              <a:defRPr sz="900" b="1">
+              <a:defRPr sz="3200" b="1">
                 <a:solidFill>
-                  <a:srgbClr val="94A3B8"/>
+                  <a:srgbClr val="A800FF"/>
                 </a:solidFill>
               </a:defRPr>
             </a:pPr>
             <a:r>
-              <a:t>CORE INNOVATION</a:t>
+              <a:t>Freya Jadhav</a:t>
             </a:r>
           </a:p>
           <a:p>
             <a:pPr>
-              <a:spcBef>
-                <a:spcPts val="400"/>
-              </a:spcBef>
-              <a:defRPr sz="1400" b="1">
+              <a:defRPr sz="2800" b="1">
                 <a:solidFill>
-                  <a:srgbClr val="0284C7"/>
+                  <a:srgbClr val="A800FF"/>
                 </a:solidFill>
               </a:defRPr>
             </a:pPr>
             <a:r>
-              <a:t>Dynamic Risk Velocity</a:t>
+              <a:t>(Team Leader)</a:t>
             </a:r>
           </a:p>
           <a:p>
             <a:pPr>
               <a:spcBef>
-                <a:spcPts val="300"/>
+                <a:spcPts val="1800"/>
               </a:spcBef>
-              <a:defRPr sz="900">
+              <a:defRPr sz="1400">
                 <a:solidFill>
-                  <a:srgbClr val="94A3B8"/>
+                  <a:srgbClr val="0F172A"/>
                 </a:solidFill>
               </a:defRPr>
             </a:pPr>
             <a:r>
-              <a:t>Vital shift tracking vs static snapshot</a:t>
-            </a:r>
-          </a:p>
-        </p:txBody>
-      </p:sp>
-      <p:sp>
-        <p:nvSpPr>
-          <p:cNvPr id="6" name="Rounded Rectangle 5"/>
+              <a:t>College: IIT Madras</a:t>
+            </a:r>
+            <a:br/>
+            <a:r>
+              <a:t>Stream: Data Science and Applications</a:t>
+            </a:r>
+            <a:br/>
+            <a:r>
+              <a:t>Year of graduation: 2028</a:t>
+            </a:r>
+          </a:p>
+        </p:txBody>
+      </p:sp>
+    </p:spTree>
+  </p:cSld>
+  <p:clrMapOvr>
+    <a:masterClrMapping/>
+  </p:clrMapOvr>
+</p:sld>
+</file>
+
+<file path=ppt/slides/slide2.xml><?xml version="1.0" encoding="utf-8"?>
+<p:sld xmlns:a="http://schemas.openxmlformats.org/drawingml/2006/main" xmlns:p="http://schemas.openxmlformats.org/presentationml/2006/main" xmlns:r="http://schemas.openxmlformats.org/officeDocument/2006/relationships">
+  <p:cSld>
+    <p:spTree>
+      <p:nvGrpSpPr>
+        <p:cNvPr id="1" name=""/>
+        <p:cNvGrpSpPr/>
+        <p:nvPr/>
+      </p:nvGrpSpPr>
+      <p:grpSpPr/>
+      <p:sp>
+        <p:nvSpPr>
+          <p:cNvPr id="2" name="Rectangle 1"/>
           <p:cNvSpPr/>
           <p:nvPr/>
         </p:nvSpPr>
         <p:spPr>
           <a:xfrm>
-            <a:off x="3429000" y="4389120"/>
-            <a:ext cx="2468880" cy="1645920"/>
+            <a:off x="0" y="0"/>
+            <a:ext cx="12191695" cy="6858000"/>
           </a:xfrm>
-          <a:prstGeom prst="roundRect">
+          <a:prstGeom prst="rect">
             <a:avLst/>
           </a:prstGeom>
           <a:solidFill>
-            <a:srgbClr val="1E293B"/>
+            <a:srgbClr val="FFFFFF"/>
           </a:solidFill>
           <a:ln>
             <a:noFill/>
@@ -3355,85 +3354,20 @@
       </p:sp>
       <p:sp>
         <p:nvSpPr>
-          <p:cNvPr id="7" name="TextBox 6"/>
-          <p:cNvSpPr txBox="1"/>
+          <p:cNvPr id="3" name="Rectangle 2"/>
+          <p:cNvSpPr/>
           <p:nvPr/>
         </p:nvSpPr>
         <p:spPr>
           <a:xfrm>
-            <a:off x="3566160" y="4480560"/>
-            <a:ext cx="2194560" cy="1463040"/>
+            <a:off x="731520" y="731520"/>
+            <a:ext cx="10728655" cy="594360"/>
           </a:xfrm>
           <a:prstGeom prst="rect">
             <a:avLst/>
           </a:prstGeom>
-          <a:noFill/>
-        </p:spPr>
-        <p:txBody>
-          <a:bodyPr wrap="square">
-            <a:spAutoFit/>
-          </a:bodyPr>
-          <a:lstStyle/>
-          <a:p>
-            <a:pPr>
-              <a:defRPr sz="900" b="1">
-                <a:solidFill>
-                  <a:srgbClr val="94A3B8"/>
-                </a:solidFill>
-              </a:defRPr>
-            </a:pPr>
-            <a:r>
-              <a:t>PHILOSOPHY</a:t>
-            </a:r>
-          </a:p>
-          <a:p>
-            <a:pPr>
-              <a:spcBef>
-                <a:spcPts val="400"/>
-              </a:spcBef>
-              <a:defRPr sz="1400" b="1">
-                <a:solidFill>
-                  <a:srgbClr val="E11D48"/>
-                </a:solidFill>
-              </a:defRPr>
-            </a:pPr>
-            <a:r>
-              <a:t>Unknown ≠ Safe</a:t>
-            </a:r>
-          </a:p>
-          <a:p>
-            <a:pPr>
-              <a:spcBef>
-                <a:spcPts val="300"/>
-              </a:spcBef>
-              <a:defRPr sz="900">
-                <a:solidFill>
-                  <a:srgbClr val="94A3B8"/>
-                </a:solidFill>
-              </a:defRPr>
-            </a:pPr>
-            <a:r>
-              <a:t>Missing data penalizes confidence</a:t>
-            </a:r>
-          </a:p>
-        </p:txBody>
-      </p:sp>
-      <p:sp>
-        <p:nvSpPr>
-          <p:cNvPr id="8" name="Rounded Rectangle 7"/>
-          <p:cNvSpPr/>
-          <p:nvPr/>
-        </p:nvSpPr>
-        <p:spPr>
-          <a:xfrm>
-            <a:off x="6126480" y="4389120"/>
-            <a:ext cx="2468880" cy="1645920"/>
-          </a:xfrm>
-          <a:prstGeom prst="roundRect">
-            <a:avLst/>
-          </a:prstGeom>
           <a:solidFill>
-            <a:srgbClr val="1E293B"/>
+            <a:srgbClr val="A800FF"/>
           </a:solidFill>
           <a:ln>
             <a:noFill/>
@@ -3454,23 +3388,32 @@
           </a:fontRef>
         </p:style>
         <p:txBody>
-          <a:bodyPr rtlCol="0" anchor="ctr"/>
-          <a:lstStyle/>
-          <a:p>
-            <a:pPr algn="ctr"/>
-          </a:p>
-        </p:txBody>
-      </p:sp>
-      <p:sp>
-        <p:nvSpPr>
-          <p:cNvPr id="9" name="TextBox 8"/>
+          <a:bodyPr rtlCol="0" anchor="ctr" wrap="square"/>
+          <a:lstStyle/>
+          <a:p>
+            <a:pPr algn="l">
+              <a:defRPr sz="2000" b="1">
+                <a:solidFill>
+                  <a:srgbClr val="FFFFFF"/>
+                </a:solidFill>
+              </a:defRPr>
+            </a:pPr>
+            <a:r>
+              <a:t> Describe the problem statement (200 words)</a:t>
+            </a:r>
+          </a:p>
+        </p:txBody>
+      </p:sp>
+      <p:sp>
+        <p:nvSpPr>
+          <p:cNvPr id="4" name="TextBox 3"/>
           <p:cNvSpPr txBox="1"/>
           <p:nvPr/>
         </p:nvSpPr>
         <p:spPr>
           <a:xfrm>
-            <a:off x="6263640" y="4480560"/>
-            <a:ext cx="2194560" cy="1463040"/>
+            <a:off x="731520" y="1554480"/>
+            <a:ext cx="10728655" cy="4846320"/>
           </a:xfrm>
           <a:prstGeom prst="rect">
             <a:avLst/>
@@ -3484,64 +3427,90 @@
           <a:lstStyle/>
           <a:p>
             <a:pPr>
-              <a:defRPr sz="900" b="1">
+              <a:defRPr sz="1600" b="1">
                 <a:solidFill>
-                  <a:srgbClr val="94A3B8"/>
+                  <a:srgbClr val="0F172A"/>
                 </a:solidFill>
               </a:defRPr>
             </a:pPr>
             <a:r>
-              <a:t>ANNUAL NET VALUE</a:t>
+              <a:t>Patient Triage Doesn’t End at Arrival: The Waiting-Room Surveillance Gap</a:t>
             </a:r>
           </a:p>
           <a:p>
             <a:pPr>
               <a:spcBef>
-                <a:spcPts val="400"/>
+                <a:spcPts val="800"/>
               </a:spcBef>
-              <a:defRPr sz="1400" b="1">
+              <a:defRPr sz="1150">
                 <a:solidFill>
-                  <a:srgbClr val="10B981"/>
+                  <a:srgbClr val="0F172A"/>
                 </a:solidFill>
               </a:defRPr>
             </a:pPr>
             <a:r>
-              <a:t>$3.82M / Hospital</a:t>
-            </a:r>
-          </a:p>
-          <a:p>
-            <a:pPr>
-              <a:spcBef>
-                <a:spcPts val="300"/>
-              </a:spcBef>
-              <a:defRPr sz="900">
-                <a:solidFill>
-                  <a:srgbClr val="94A3B8"/>
-                </a:solidFill>
-              </a:defRPr>
-            </a:pPr>
-            <a:r>
-              <a:t>64% Avoided ICU Transfers + LWBS</a:t>
-            </a:r>
-          </a:p>
-        </p:txBody>
-      </p:sp>
-      <p:sp>
-        <p:nvSpPr>
-          <p:cNvPr id="10" name="Rounded Rectangle 9"/>
+              <a:t>Emergency departments face acute operational strain during mass-casualty surges and peak hours. Globally, emergency crowding increases 10-day patient mortality by ~30%, with 90% of emergency medical condition deaths preventable through timely prioritization. In India, ranking 144th in emergency access, over 79% of healthcare workers report triage bottlenecks as their primary operational barrier, compounded by the fact that only 12.14% of registrations capture structured diagnostic data at intake.</a:t>
+            </a:r>
+            <a:br/>
+            <a:br/>
+            <a:r>
+              <a:t>The fundamental failure of current emergency workflows is that triage is treated as a one-time static snapshot at the front door. However, arrival classification quickly degrades: patients initially categorized as lower risk can silently deteriorate, exceed clinically safe reassessment windows, or experience internal decompensation while waiting unmonitored.</a:t>
+            </a:r>
+            <a:br/>
+            <a:br/>
+            <a:r>
+              <a:t>When clinical staff are overwhelmed, data is incomplete, and clinical attention becomes the scarce resource, two distinct decisions must be made:</a:t>
+            </a:r>
+            <a:br/>
+            <a:r>
+              <a:t>• Who needs attention first upon arrival?</a:t>
+            </a:r>
+            <a:br/>
+            <a:r>
+              <a:t>• Who is no longer safe to keep waiting?</a:t>
+            </a:r>
+            <a:br/>
+            <a:br/>
+            <a:r>
+              <a:t>Current systems fail to monitor this second, life-critical question, resulting in dangerous unmonitored delays, alert fatigue, and preventable patient mortality.</a:t>
+            </a:r>
+          </a:p>
+        </p:txBody>
+      </p:sp>
+    </p:spTree>
+  </p:cSld>
+  <p:clrMapOvr>
+    <a:masterClrMapping/>
+  </p:clrMapOvr>
+</p:sld>
+</file>
+
+<file path=ppt/slides/slide3.xml><?xml version="1.0" encoding="utf-8"?>
+<p:sld xmlns:a="http://schemas.openxmlformats.org/drawingml/2006/main" xmlns:p="http://schemas.openxmlformats.org/presentationml/2006/main" xmlns:r="http://schemas.openxmlformats.org/officeDocument/2006/relationships">
+  <p:cSld>
+    <p:spTree>
+      <p:nvGrpSpPr>
+        <p:cNvPr id="1" name=""/>
+        <p:cNvGrpSpPr/>
+        <p:nvPr/>
+      </p:nvGrpSpPr>
+      <p:grpSpPr/>
+      <p:sp>
+        <p:nvSpPr>
+          <p:cNvPr id="2" name="Rectangle 1"/>
           <p:cNvSpPr/>
           <p:nvPr/>
         </p:nvSpPr>
         <p:spPr>
           <a:xfrm>
-            <a:off x="8823960" y="4389120"/>
-            <a:ext cx="2468880" cy="1645920"/>
+            <a:off x="0" y="0"/>
+            <a:ext cx="12191695" cy="6858000"/>
           </a:xfrm>
-          <a:prstGeom prst="roundRect">
+          <a:prstGeom prst="rect">
             <a:avLst/>
           </a:prstGeom>
           <a:solidFill>
-            <a:srgbClr val="1E293B"/>
+            <a:srgbClr val="FFFFFF"/>
           </a:solidFill>
           <a:ln>
             <a:noFill/>
@@ -3571,103 +3540,20 @@
       </p:sp>
       <p:sp>
         <p:nvSpPr>
-          <p:cNvPr id="11" name="TextBox 10"/>
-          <p:cNvSpPr txBox="1"/>
+          <p:cNvPr id="3" name="Rectangle 2"/>
+          <p:cNvSpPr/>
           <p:nvPr/>
         </p:nvSpPr>
         <p:spPr>
           <a:xfrm>
-            <a:off x="8961120" y="4480560"/>
-            <a:ext cx="2194560" cy="1463040"/>
-          </a:xfrm>
-          <a:prstGeom prst="rect">
-            <a:avLst/>
-          </a:prstGeom>
-          <a:noFill/>
-        </p:spPr>
-        <p:txBody>
-          <a:bodyPr wrap="square">
-            <a:spAutoFit/>
-          </a:bodyPr>
-          <a:lstStyle/>
-          <a:p>
-            <a:pPr>
-              <a:defRPr sz="900" b="1">
-                <a:solidFill>
-                  <a:srgbClr val="94A3B8"/>
-                </a:solidFill>
-              </a:defRPr>
-            </a:pPr>
-            <a:r>
-              <a:t>AUTHOR &amp; TRACK</a:t>
-            </a:r>
-          </a:p>
-          <a:p>
-            <a:pPr>
-              <a:spcBef>
-                <a:spcPts val="400"/>
-              </a:spcBef>
-              <a:defRPr sz="1400" b="1">
-                <a:solidFill>
-                  <a:srgbClr val="FFFFFF"/>
-                </a:solidFill>
-              </a:defRPr>
-            </a:pPr>
-            <a:r>
-              <a:t>Freya Jadhav (freya1705)</a:t>
-            </a:r>
-          </a:p>
-          <a:p>
-            <a:pPr>
-              <a:spcBef>
-                <a:spcPts val="300"/>
-              </a:spcBef>
-              <a:defRPr sz="900">
-                <a:solidFill>
-                  <a:srgbClr val="94A3B8"/>
-                </a:solidFill>
-              </a:defRPr>
-            </a:pPr>
-            <a:r>
-              <a:t>Round 2 Technical Prototype &amp; Proposal</a:t>
-            </a:r>
-          </a:p>
-        </p:txBody>
-      </p:sp>
-    </p:spTree>
-  </p:cSld>
-  <p:clrMapOvr>
-    <a:masterClrMapping/>
-  </p:clrMapOvr>
-</p:sld>
-</file>
-
-<file path=ppt/slides/slide2.xml><?xml version="1.0" encoding="utf-8"?>
-<p:sld xmlns:a="http://schemas.openxmlformats.org/drawingml/2006/main" xmlns:p="http://schemas.openxmlformats.org/presentationml/2006/main" xmlns:r="http://schemas.openxmlformats.org/officeDocument/2006/relationships">
-  <p:cSld>
-    <p:spTree>
-      <p:nvGrpSpPr>
-        <p:cNvPr id="1" name=""/>
-        <p:cNvGrpSpPr/>
-        <p:nvPr/>
-      </p:nvGrpSpPr>
-      <p:grpSpPr/>
-      <p:sp>
-        <p:nvSpPr>
-          <p:cNvPr id="2" name="Rectangle 1"/>
-          <p:cNvSpPr/>
-          <p:nvPr/>
-        </p:nvSpPr>
-        <p:spPr>
-          <a:xfrm>
-            <a:off x="0" y="0"/>
-            <a:ext cx="12191695" cy="6858000"/>
+            <a:off x="731520" y="731520"/>
+            <a:ext cx="10728655" cy="594360"/>
           </a:xfrm>
           <a:prstGeom prst="rect">
             <a:avLst/>
           </a:prstGeom>
           <a:solidFill>
-            <a:srgbClr val="0F172A"/>
+            <a:srgbClr val="A800FF"/>
           </a:solidFill>
           <a:ln>
             <a:noFill/>
@@ -3688,23 +3574,32 @@
           </a:fontRef>
         </p:style>
         <p:txBody>
-          <a:bodyPr rtlCol="0" anchor="ctr"/>
-          <a:lstStyle/>
-          <a:p>
-            <a:pPr algn="ctr"/>
-          </a:p>
-        </p:txBody>
-      </p:sp>
-      <p:sp>
-        <p:nvSpPr>
-          <p:cNvPr id="3" name="TextBox 2"/>
+          <a:bodyPr rtlCol="0" anchor="ctr" wrap="square"/>
+          <a:lstStyle/>
+          <a:p>
+            <a:pPr algn="l">
+              <a:defRPr sz="2000" b="1">
+                <a:solidFill>
+                  <a:srgbClr val="FFFFFF"/>
+                </a:solidFill>
+              </a:defRPr>
+            </a:pPr>
+            <a:r>
+              <a:t> Proposed solution (200 words)</a:t>
+            </a:r>
+          </a:p>
+        </p:txBody>
+      </p:sp>
+      <p:sp>
+        <p:nvSpPr>
+          <p:cNvPr id="4" name="TextBox 3"/>
           <p:cNvSpPr txBox="1"/>
           <p:nvPr/>
         </p:nvSpPr>
         <p:spPr>
           <a:xfrm>
-            <a:off x="731520" y="457200"/>
-            <a:ext cx="10698480" cy="320040"/>
+            <a:off x="731520" y="1463040"/>
+            <a:ext cx="10728655" cy="2377440"/>
           </a:xfrm>
           <a:prstGeom prst="rect">
             <a:avLst/>
@@ -3718,433 +3613,407 @@
           <a:lstStyle/>
           <a:p>
             <a:pPr>
-              <a:defRPr sz="1000" b="1">
+              <a:defRPr sz="1300" b="1">
                 <a:solidFill>
-                  <a:srgbClr val="0284C7"/>
+                  <a:srgbClr val="0F172A"/>
                 </a:solidFill>
               </a:defRPr>
             </a:pPr>
             <a:r>
-              <a:t>ACCENTURE INNOVATION CHALLENGE 2026</a:t>
-            </a:r>
-          </a:p>
-        </p:txBody>
-      </p:sp>
-      <p:sp>
-        <p:nvSpPr>
-          <p:cNvPr id="4" name="TextBox 3"/>
-          <p:cNvSpPr txBox="1"/>
-          <p:nvPr/>
-        </p:nvSpPr>
-        <p:spPr>
-          <a:xfrm>
-            <a:off x="731520" y="731520"/>
-            <a:ext cx="10698480" cy="548640"/>
-          </a:xfrm>
-          <a:prstGeom prst="rect">
-            <a:avLst/>
-          </a:prstGeom>
-          <a:noFill/>
-        </p:spPr>
-        <p:txBody>
-          <a:bodyPr wrap="square">
-            <a:spAutoFit/>
-          </a:bodyPr>
-          <a:lstStyle/>
+              <a:t>Core Loop: Arrive → Prioritize → Wait → Monitor → Reprioritize</a:t>
+            </a:r>
+          </a:p>
           <a:p>
             <a:pPr>
-              <a:defRPr sz="2200" b="1">
+              <a:spcBef>
+                <a:spcPts val="400"/>
+              </a:spcBef>
+              <a:defRPr sz="1000">
                 <a:solidFill>
-                  <a:srgbClr val="FFFFFF"/>
+                  <a:srgbClr val="0F172A"/>
                 </a:solidFill>
               </a:defRPr>
             </a:pPr>
             <a:r>
-              <a:t>The Crisis: The Blind Spot in Emergency Waiting Rooms</a:t>
-            </a:r>
-          </a:p>
-        </p:txBody>
-      </p:sp>
-      <p:sp>
-        <p:nvSpPr>
-          <p:cNvPr id="5" name="Rounded Rectangle 4"/>
-          <p:cNvSpPr/>
+              <a:t>Step 1: Rapid Arrival Prioritization. Uses intake symptoms, vitals, complaint, and injury type to assign immediate priority. Supports standard hospital triage (ESI 1–5) and switches instantly to mass-casualty disaster mode (Red/Yellow/Green/Black).</a:t>
+            </a:r>
+            <a:br/>
+            <a:r>
+              <a:t>Step 2: Continuous Waiting-Room Safety. Continuously monitors patients while they wait using automated timers (elapsed wait time and overdue review windows) and new vitals entered during regular checks—without needing expensive wearable sensors.</a:t>
+            </a:r>
+            <a:br/>
+            <a:r>
+              <a:t>Step 3: Workflow Automation vs. Human Authority. Automated by System: Tracks waiting timers, flags missing vitals, triggers hospital escalation ladders, and ranks urgent tasks. Decided by Doctors: Medical diagnosis, treatment plans, prescriptions, and 100% final override authority.</a:t>
+            </a:r>
+            <a:br/>
+            <a:r>
+              <a:t>Step 4: Live Action Queue &amp; Safety Guardrail. Surfaces a clean Top-3 Action Queue for staff instead of noisy alarms. Follows the core rule: Uncertainty ≠ Low Risk—missing critical vitals blocks a safe rating and triggers immediate human review.</a:t>
+            </a:r>
+          </a:p>
+        </p:txBody>
+      </p:sp>
+      <p:graphicFrame>
+        <p:nvGraphicFramePr>
+          <p:cNvPr id="5" name="Table 4"/>
+          <p:cNvGraphicFramePr>
+            <a:graphicFrameLocks noGrp="1"/>
+          </p:cNvGraphicFramePr>
           <p:nvPr/>
-        </p:nvSpPr>
-        <p:spPr>
-          <a:xfrm>
-            <a:off x="731520" y="1554480"/>
-            <a:ext cx="5257800" cy="2148840"/>
-          </a:xfrm>
-          <a:prstGeom prst="roundRect">
-            <a:avLst/>
-          </a:prstGeom>
-          <a:solidFill>
-            <a:srgbClr val="1E293B"/>
-          </a:solidFill>
-          <a:ln w="19050">
-            <a:solidFill>
-              <a:srgbClr val="E11D48"/>
-            </a:solidFill>
-          </a:ln>
-        </p:spPr>
-        <p:style>
-          <a:lnRef idx="1">
-            <a:schemeClr val="accent1"/>
-          </a:lnRef>
-          <a:fillRef idx="3">
-            <a:schemeClr val="accent1"/>
-          </a:fillRef>
-          <a:effectRef idx="2">
-            <a:schemeClr val="accent1"/>
-          </a:effectRef>
-          <a:fontRef idx="minor">
-            <a:schemeClr val="lt1"/>
-          </a:fontRef>
-        </p:style>
-        <p:txBody>
-          <a:bodyPr rtlCol="0" anchor="ctr"/>
-          <a:lstStyle/>
-          <a:p>
-            <a:pPr algn="ctr"/>
-          </a:p>
-        </p:txBody>
-      </p:sp>
-      <p:sp>
-        <p:nvSpPr>
-          <p:cNvPr id="6" name="TextBox 5"/>
-          <p:cNvSpPr txBox="1"/>
-          <p:nvPr/>
-        </p:nvSpPr>
-        <p:spPr>
-          <a:xfrm>
-            <a:off x="960120" y="1737360"/>
-            <a:ext cx="4800600" cy="1783080"/>
-          </a:xfrm>
-          <a:prstGeom prst="rect">
-            <a:avLst/>
-          </a:prstGeom>
-          <a:noFill/>
-        </p:spPr>
-        <p:txBody>
-          <a:bodyPr wrap="square">
-            <a:spAutoFit/>
-          </a:bodyPr>
-          <a:lstStyle/>
-          <a:p>
-            <a:pPr>
-              <a:defRPr sz="1600" b="1">
-                <a:solidFill>
-                  <a:srgbClr val="E11D48"/>
-                </a:solidFill>
-              </a:defRPr>
-            </a:pPr>
-            <a:r>
-              <a:t>1. Silent Decompensation</a:t>
-            </a:r>
-          </a:p>
-          <a:p>
-            <a:pPr>
-              <a:spcBef>
-                <a:spcPts val="800"/>
-              </a:spcBef>
-              <a:defRPr sz="1100">
-                <a:solidFill>
-                  <a:srgbClr val="FFFFFF"/>
-                </a:solidFill>
-              </a:defRPr>
-            </a:pPr>
-            <a:r>
-              <a:t>140M annual visits face 3–6 hr wait times. ESI 3/4 patients worsen unmonitored; physiological decline may remain undetected until sudden collapse.</a:t>
-            </a:r>
-          </a:p>
-        </p:txBody>
-      </p:sp>
-      <p:sp>
-        <p:nvSpPr>
-          <p:cNvPr id="7" name="Rounded Rectangle 6"/>
-          <p:cNvSpPr/>
-          <p:nvPr/>
-        </p:nvSpPr>
-        <p:spPr>
-          <a:xfrm>
-            <a:off x="6172200" y="1554480"/>
-            <a:ext cx="5257800" cy="2148840"/>
-          </a:xfrm>
-          <a:prstGeom prst="roundRect">
-            <a:avLst/>
-          </a:prstGeom>
-          <a:solidFill>
-            <a:srgbClr val="1E293B"/>
-          </a:solidFill>
-          <a:ln w="19050">
-            <a:solidFill>
-              <a:srgbClr val="F59E0B"/>
-            </a:solidFill>
-          </a:ln>
-        </p:spPr>
-        <p:style>
-          <a:lnRef idx="1">
-            <a:schemeClr val="accent1"/>
-          </a:lnRef>
-          <a:fillRef idx="3">
-            <a:schemeClr val="accent1"/>
-          </a:fillRef>
-          <a:effectRef idx="2">
-            <a:schemeClr val="accent1"/>
-          </a:effectRef>
-          <a:fontRef idx="minor">
-            <a:schemeClr val="lt1"/>
-          </a:fontRef>
-        </p:style>
-        <p:txBody>
-          <a:bodyPr rtlCol="0" anchor="ctr"/>
-          <a:lstStyle/>
-          <a:p>
-            <a:pPr algn="ctr"/>
-          </a:p>
-        </p:txBody>
-      </p:sp>
-      <p:sp>
-        <p:nvSpPr>
-          <p:cNvPr id="8" name="TextBox 7"/>
-          <p:cNvSpPr txBox="1"/>
-          <p:nvPr/>
-        </p:nvSpPr>
-        <p:spPr>
-          <a:xfrm>
-            <a:off x="6400800" y="1737360"/>
-            <a:ext cx="4800600" cy="1783080"/>
-          </a:xfrm>
-          <a:prstGeom prst="rect">
-            <a:avLst/>
-          </a:prstGeom>
-          <a:noFill/>
-        </p:spPr>
-        <p:txBody>
-          <a:bodyPr wrap="square">
-            <a:spAutoFit/>
-          </a:bodyPr>
-          <a:lstStyle/>
-          <a:p>
-            <a:pPr>
-              <a:defRPr sz="1600" b="1">
-                <a:solidFill>
-                  <a:srgbClr val="F59E0B"/>
-                </a:solidFill>
-              </a:defRPr>
-            </a:pPr>
-            <a:r>
-              <a:t>2. The 'Missing Data Is Safe' Myth</a:t>
-            </a:r>
-          </a:p>
-          <a:p>
-            <a:pPr>
-              <a:spcBef>
-                <a:spcPts val="800"/>
-              </a:spcBef>
-              <a:defRPr sz="1100">
-                <a:solidFill>
-                  <a:srgbClr val="FFFFFF"/>
-                </a:solidFill>
-              </a:defRPr>
-            </a:pPr>
-            <a:r>
-              <a:t>Traditional triage algorithms treat missing vitals as benign. Under 'Unknown is NOT Safe', incomplete data heightens vigilance instead of offering false reassurance.</a:t>
-            </a:r>
-          </a:p>
-        </p:txBody>
-      </p:sp>
-      <p:sp>
-        <p:nvSpPr>
-          <p:cNvPr id="9" name="Rounded Rectangle 8"/>
-          <p:cNvSpPr/>
-          <p:nvPr/>
-        </p:nvSpPr>
-        <p:spPr>
-          <a:xfrm>
-            <a:off x="731520" y="3931920"/>
-            <a:ext cx="5257800" cy="2148840"/>
-          </a:xfrm>
-          <a:prstGeom prst="roundRect">
-            <a:avLst/>
-          </a:prstGeom>
-          <a:solidFill>
-            <a:srgbClr val="1E293B"/>
-          </a:solidFill>
-          <a:ln w="19050">
-            <a:solidFill>
-              <a:srgbClr val="0284C7"/>
-            </a:solidFill>
-          </a:ln>
-        </p:spPr>
-        <p:style>
-          <a:lnRef idx="1">
-            <a:schemeClr val="accent1"/>
-          </a:lnRef>
-          <a:fillRef idx="3">
-            <a:schemeClr val="accent1"/>
-          </a:fillRef>
-          <a:effectRef idx="2">
-            <a:schemeClr val="accent1"/>
-          </a:effectRef>
-          <a:fontRef idx="minor">
-            <a:schemeClr val="lt1"/>
-          </a:fontRef>
-        </p:style>
-        <p:txBody>
-          <a:bodyPr rtlCol="0" anchor="ctr"/>
-          <a:lstStyle/>
-          <a:p>
-            <a:pPr algn="ctr"/>
-          </a:p>
-        </p:txBody>
-      </p:sp>
-      <p:sp>
-        <p:nvSpPr>
-          <p:cNvPr id="10" name="TextBox 9"/>
-          <p:cNvSpPr txBox="1"/>
-          <p:nvPr/>
-        </p:nvSpPr>
-        <p:spPr>
-          <a:xfrm>
-            <a:off x="960120" y="4114800"/>
-            <a:ext cx="4800600" cy="1783080"/>
-          </a:xfrm>
-          <a:prstGeom prst="rect">
-            <a:avLst/>
-          </a:prstGeom>
-          <a:noFill/>
-        </p:spPr>
-        <p:txBody>
-          <a:bodyPr wrap="square">
-            <a:spAutoFit/>
-          </a:bodyPr>
-          <a:lstStyle/>
-          <a:p>
-            <a:pPr>
-              <a:defRPr sz="1600" b="1">
-                <a:solidFill>
-                  <a:srgbClr val="0284C7"/>
-                </a:solidFill>
-              </a:defRPr>
-            </a:pPr>
-            <a:r>
-              <a:t>3. The Attention Bottleneck</a:t>
-            </a:r>
-          </a:p>
-          <a:p>
-            <a:pPr>
-              <a:spcBef>
-                <a:spcPts val="800"/>
-              </a:spcBef>
-              <a:defRPr sz="1100">
-                <a:solidFill>
-                  <a:srgbClr val="FFFFFF"/>
-                </a:solidFill>
-              </a:defRPr>
-            </a:pPr>
-            <a:r>
-              <a:t>Attended critical patients anchor doctors and block queues, while deteriorating unmonitored patients stay hidden at the bottom of the list.</a:t>
-            </a:r>
-          </a:p>
-        </p:txBody>
-      </p:sp>
-      <p:sp>
-        <p:nvSpPr>
-          <p:cNvPr id="11" name="Rounded Rectangle 10"/>
-          <p:cNvSpPr/>
-          <p:nvPr/>
-        </p:nvSpPr>
-        <p:spPr>
-          <a:xfrm>
-            <a:off x="6172200" y="3931920"/>
-            <a:ext cx="5257800" cy="2148840"/>
-          </a:xfrm>
-          <a:prstGeom prst="roundRect">
-            <a:avLst/>
-          </a:prstGeom>
-          <a:solidFill>
-            <a:srgbClr val="1E293B"/>
-          </a:solidFill>
-          <a:ln w="19050">
-            <a:solidFill>
-              <a:srgbClr val="10B981"/>
-            </a:solidFill>
-          </a:ln>
-        </p:spPr>
-        <p:style>
-          <a:lnRef idx="1">
-            <a:schemeClr val="accent1"/>
-          </a:lnRef>
-          <a:fillRef idx="3">
-            <a:schemeClr val="accent1"/>
-          </a:fillRef>
-          <a:effectRef idx="2">
-            <a:schemeClr val="accent1"/>
-          </a:effectRef>
-          <a:fontRef idx="minor">
-            <a:schemeClr val="lt1"/>
-          </a:fontRef>
-        </p:style>
-        <p:txBody>
-          <a:bodyPr rtlCol="0" anchor="ctr"/>
-          <a:lstStyle/>
-          <a:p>
-            <a:pPr algn="ctr"/>
-          </a:p>
-        </p:txBody>
-      </p:sp>
-      <p:sp>
-        <p:nvSpPr>
-          <p:cNvPr id="12" name="TextBox 11"/>
-          <p:cNvSpPr txBox="1"/>
-          <p:nvPr/>
-        </p:nvSpPr>
-        <p:spPr>
-          <a:xfrm>
-            <a:off x="6400800" y="4114800"/>
-            <a:ext cx="4800600" cy="1783080"/>
-          </a:xfrm>
-          <a:prstGeom prst="rect">
-            <a:avLst/>
-          </a:prstGeom>
-          <a:noFill/>
-        </p:spPr>
-        <p:txBody>
-          <a:bodyPr wrap="square">
-            <a:spAutoFit/>
-          </a:bodyPr>
-          <a:lstStyle/>
-          <a:p>
-            <a:pPr>
-              <a:defRPr sz="1600" b="1">
-                <a:solidFill>
-                  <a:srgbClr val="10B981"/>
-                </a:solidFill>
-              </a:defRPr>
-            </a:pPr>
-            <a:r>
-              <a:t>4. Legacy EHR Blind Spot</a:t>
-            </a:r>
-          </a:p>
-          <a:p>
-            <a:pPr>
-              <a:spcBef>
-                <a:spcPts val="800"/>
-              </a:spcBef>
-              <a:defRPr sz="1100">
-                <a:solidFill>
-                  <a:srgbClr val="FFFFFF"/>
-                </a:solidFill>
-              </a:defRPr>
-            </a:pPr>
-            <a:r>
-              <a:t>Epic EDI &amp; Cerner MEWS only score admitted inpatient beds. PatientTriage.ai is purpose-built for waiting rooms and clinician coverage gaps.</a:t>
-            </a:r>
-          </a:p>
-        </p:txBody>
-      </p:sp>
+        </p:nvGraphicFramePr>
+        <p:xfrm>
+          <a:off x="731520" y="3931920"/>
+          <a:ext cx="10728655" cy="2468880"/>
+        </p:xfrm>
+        <a:graphic>
+          <a:graphicData uri="http://schemas.openxmlformats.org/drawingml/2006/table">
+            <a:tbl>
+              <a:tblPr firstRow="1" bandRow="1">
+                <a:tableStyleId>{5C22544A-7EE6-4342-B048-85BDC9FD1C3A}</a:tableStyleId>
+              </a:tblPr>
+              <a:tblGrid>
+                <a:gridCol w="5029200"/>
+                <a:gridCol w="5699455"/>
+              </a:tblGrid>
+              <a:tr h="352697">
+                <a:tc>
+                  <a:txBody>
+                    <a:bodyPr/>
+                    <a:lstStyle/>
+                    <a:p>
+                      <a:pPr>
+                        <a:defRPr sz="1000" b="1">
+                          <a:solidFill>
+                            <a:srgbClr val="0F172A"/>
+                          </a:solidFill>
+                        </a:defRPr>
+                      </a:pPr>
+                      <a:r>
+                        <a:t>Most systems</a:t>
+                      </a:r>
+                    </a:p>
+                  </a:txBody>
+                  <a:tcPr>
+                    <a:solidFill>
+                      <a:srgbClr val="99F6E4"/>
+                    </a:solidFill>
+                  </a:tcPr>
+                </a:tc>
+                <a:tc>
+                  <a:txBody>
+                    <a:bodyPr/>
+                    <a:lstStyle/>
+                    <a:p>
+                      <a:pPr>
+                        <a:defRPr sz="1000" b="1">
+                          <a:solidFill>
+                            <a:srgbClr val="0F172A"/>
+                          </a:solidFill>
+                        </a:defRPr>
+                      </a:pPr>
+                      <a:r>
+                        <a:t>PatientTriage.ai</a:t>
+                      </a:r>
+                    </a:p>
+                  </a:txBody>
+                  <a:tcPr>
+                    <a:solidFill>
+                      <a:srgbClr val="99F6E4"/>
+                    </a:solidFill>
+                  </a:tcPr>
+                </a:tc>
+              </a:tr>
+              <a:tr h="352697">
+                <a:tc>
+                  <a:txBody>
+                    <a:bodyPr/>
+                    <a:lstStyle/>
+                    <a:p>
+                      <a:pPr>
+                        <a:defRPr sz="1000" b="0">
+                          <a:solidFill>
+                            <a:srgbClr val="0F172A"/>
+                          </a:solidFill>
+                        </a:defRPr>
+                      </a:pPr>
+                      <a:r>
+                        <a:t>Assess patients at arrival</a:t>
+                      </a:r>
+                    </a:p>
+                  </a:txBody>
+                  <a:tcPr>
+                    <a:solidFill>
+                      <a:srgbClr val="F0FDFA"/>
+                    </a:solidFill>
+                  </a:tcPr>
+                </a:tc>
+                <a:tc>
+                  <a:txBody>
+                    <a:bodyPr/>
+                    <a:lstStyle/>
+                    <a:p>
+                      <a:pPr>
+                        <a:defRPr sz="1000" b="0">
+                          <a:solidFill>
+                            <a:srgbClr val="0F172A"/>
+                          </a:solidFill>
+                        </a:defRPr>
+                      </a:pPr>
+                      <a:r>
+                        <a:t>Continues monitoring while they wait</a:t>
+                      </a:r>
+                    </a:p>
+                  </a:txBody>
+                  <a:tcPr>
+                    <a:solidFill>
+                      <a:srgbClr val="F0FDFA"/>
+                    </a:solidFill>
+                  </a:tcPr>
+                </a:tc>
+              </a:tr>
+              <a:tr h="352697">
+                <a:tc>
+                  <a:txBody>
+                    <a:bodyPr/>
+                    <a:lstStyle/>
+                    <a:p>
+                      <a:pPr>
+                        <a:defRPr sz="1000" b="0">
+                          <a:solidFill>
+                            <a:srgbClr val="0F172A"/>
+                          </a:solidFill>
+                        </a:defRPr>
+                      </a:pPr>
+                      <a:r>
+                        <a:t>Give a fixed risk score</a:t>
+                      </a:r>
+                    </a:p>
+                  </a:txBody>
+                  <a:tcPr>
+                    <a:solidFill>
+                      <a:srgbClr val="F0FDFA"/>
+                    </a:solidFill>
+                  </a:tcPr>
+                </a:tc>
+                <a:tc>
+                  <a:txBody>
+                    <a:bodyPr/>
+                    <a:lstStyle/>
+                    <a:p>
+                      <a:pPr>
+                        <a:defRPr sz="1000" b="0">
+                          <a:solidFill>
+                            <a:srgbClr val="0F172A"/>
+                          </a:solidFill>
+                        </a:defRPr>
+                      </a:pPr>
+                      <a:r>
+                        <a:t>Updates priority when risk changes</a:t>
+                      </a:r>
+                    </a:p>
+                  </a:txBody>
+                  <a:tcPr>
+                    <a:solidFill>
+                      <a:srgbClr val="F0FDFA"/>
+                    </a:solidFill>
+                  </a:tcPr>
+                </a:tc>
+              </a:tr>
+              <a:tr h="352697">
+                <a:tc>
+                  <a:txBody>
+                    <a:bodyPr/>
+                    <a:lstStyle/>
+                    <a:p>
+                      <a:pPr>
+                        <a:defRPr sz="1000" b="0">
+                          <a:solidFill>
+                            <a:srgbClr val="0F172A"/>
+                          </a:solidFill>
+                        </a:defRPr>
+                      </a:pPr>
+                      <a:r>
+                        <a:t>Track queues</a:t>
+                      </a:r>
+                    </a:p>
+                  </a:txBody>
+                  <a:tcPr>
+                    <a:solidFill>
+                      <a:srgbClr val="F0FDFA"/>
+                    </a:solidFill>
+                  </a:tcPr>
+                </a:tc>
+                <a:tc>
+                  <a:txBody>
+                    <a:bodyPr/>
+                    <a:lstStyle/>
+                    <a:p>
+                      <a:pPr>
+                        <a:defRPr sz="1000" b="0">
+                          <a:solidFill>
+                            <a:srgbClr val="0F172A"/>
+                          </a:solidFill>
+                        </a:defRPr>
+                      </a:pPr>
+                      <a:r>
+                        <a:t>Treats long waiting time as a safety signal</a:t>
+                      </a:r>
+                    </a:p>
+                  </a:txBody>
+                  <a:tcPr>
+                    <a:solidFill>
+                      <a:srgbClr val="F0FDFA"/>
+                    </a:solidFill>
+                  </a:tcPr>
+                </a:tc>
+              </a:tr>
+              <a:tr h="352697">
+                <a:tc>
+                  <a:txBody>
+                    <a:bodyPr/>
+                    <a:lstStyle/>
+                    <a:p>
+                      <a:pPr>
+                        <a:defRPr sz="1000" b="0">
+                          <a:solidFill>
+                            <a:srgbClr val="0F172A"/>
+                          </a:solidFill>
+                        </a:defRPr>
+                      </a:pPr>
+                      <a:r>
+                        <a:t>May struggle with missing data</a:t>
+                      </a:r>
+                    </a:p>
+                  </a:txBody>
+                  <a:tcPr>
+                    <a:solidFill>
+                      <a:srgbClr val="F0FDFA"/>
+                    </a:solidFill>
+                  </a:tcPr>
+                </a:tc>
+                <a:tc>
+                  <a:txBody>
+                    <a:bodyPr/>
+                    <a:lstStyle/>
+                    <a:p>
+                      <a:pPr>
+                        <a:defRPr sz="1000" b="0">
+                          <a:solidFill>
+                            <a:srgbClr val="0F172A"/>
+                          </a:solidFill>
+                        </a:defRPr>
+                      </a:pPr>
+                      <a:r>
+                        <a:t>Flags uncertainty for human review</a:t>
+                      </a:r>
+                    </a:p>
+                  </a:txBody>
+                  <a:tcPr>
+                    <a:solidFill>
+                      <a:srgbClr val="F0FDFA"/>
+                    </a:solidFill>
+                  </a:tcPr>
+                </a:tc>
+              </a:tr>
+              <a:tr h="352697">
+                <a:tc>
+                  <a:txBody>
+                    <a:bodyPr/>
+                    <a:lstStyle/>
+                    <a:p>
+                      <a:pPr>
+                        <a:defRPr sz="1000" b="0">
+                          <a:solidFill>
+                            <a:srgbClr val="0F172A"/>
+                          </a:solidFill>
+                        </a:defRPr>
+                      </a:pPr>
+                      <a:r>
+                        <a:t>Generate many alerts</a:t>
+                      </a:r>
+                    </a:p>
+                  </a:txBody>
+                  <a:tcPr>
+                    <a:solidFill>
+                      <a:srgbClr val="F0FDFA"/>
+                    </a:solidFill>
+                  </a:tcPr>
+                </a:tc>
+                <a:tc>
+                  <a:txBody>
+                    <a:bodyPr/>
+                    <a:lstStyle/>
+                    <a:p>
+                      <a:pPr>
+                        <a:defRPr sz="1000" b="0">
+                          <a:solidFill>
+                            <a:srgbClr val="0F172A"/>
+                          </a:solidFill>
+                        </a:defRPr>
+                      </a:pPr>
+                      <a:r>
+                        <a:t>Shows only the Top-3 actions first</a:t>
+                      </a:r>
+                    </a:p>
+                  </a:txBody>
+                  <a:tcPr>
+                    <a:solidFill>
+                      <a:srgbClr val="F0FDFA"/>
+                    </a:solidFill>
+                  </a:tcPr>
+                </a:tc>
+              </a:tr>
+              <a:tr h="352698">
+                <a:tc>
+                  <a:txBody>
+                    <a:bodyPr/>
+                    <a:lstStyle/>
+                    <a:p>
+                      <a:pPr>
+                        <a:defRPr sz="1000" b="0">
+                          <a:solidFill>
+                            <a:srgbClr val="0F172A"/>
+                          </a:solidFill>
+                        </a:defRPr>
+                      </a:pPr>
+                      <a:r>
+                        <a:t>Depend heavily on hospital systems</a:t>
+                      </a:r>
+                    </a:p>
+                  </a:txBody>
+                  <a:tcPr>
+                    <a:solidFill>
+                      <a:srgbClr val="F0FDFA"/>
+                    </a:solidFill>
+                  </a:tcPr>
+                </a:tc>
+                <a:tc>
+                  <a:txBody>
+                    <a:bodyPr/>
+                    <a:lstStyle/>
+                    <a:p>
+                      <a:pPr>
+                        <a:defRPr sz="1000" b="0">
+                          <a:solidFill>
+                            <a:srgbClr val="0F172A"/>
+                          </a:solidFill>
+                        </a:defRPr>
+                      </a:pPr>
+                      <a:r>
+                        <a:t>Standalone-first and integration-ready</a:t>
+                      </a:r>
+                    </a:p>
+                  </a:txBody>
+                  <a:tcPr>
+                    <a:solidFill>
+                      <a:srgbClr val="F0FDFA"/>
+                    </a:solidFill>
+                  </a:tcPr>
+                </a:tc>
+              </a:tr>
+            </a:tbl>
+          </a:graphicData>
+        </a:graphic>
+      </p:graphicFrame>
     </p:spTree>
   </p:cSld>
   <p:clrMapOvr>
@@ -4153,7 +4022,7 @@
 </p:sld>
 </file>
 
-<file path=ppt/slides/slide3.xml><?xml version="1.0" encoding="utf-8"?>
+<file path=ppt/slides/slide4.xml><?xml version="1.0" encoding="utf-8"?>
 <p:sld xmlns:a="http://schemas.openxmlformats.org/drawingml/2006/main" xmlns:p="http://schemas.openxmlformats.org/presentationml/2006/main" xmlns:r="http://schemas.openxmlformats.org/officeDocument/2006/relationships">
   <p:cSld>
     <p:spTree>
@@ -4178,7 +4047,7 @@
             <a:avLst/>
           </a:prstGeom>
           <a:solidFill>
-            <a:srgbClr val="0F172A"/>
+            <a:srgbClr val="FFFFFF"/>
           </a:solidFill>
           <a:ln>
             <a:noFill/>
@@ -4208,413 +4077,20 @@
       </p:sp>
       <p:sp>
         <p:nvSpPr>
-          <p:cNvPr id="3" name="TextBox 2"/>
-          <p:cNvSpPr txBox="1"/>
-          <p:nvPr/>
-        </p:nvSpPr>
-        <p:spPr>
-          <a:xfrm>
-            <a:off x="731520" y="457200"/>
-            <a:ext cx="10698480" cy="320040"/>
-          </a:xfrm>
-          <a:prstGeom prst="rect">
-            <a:avLst/>
-          </a:prstGeom>
-          <a:noFill/>
-        </p:spPr>
-        <p:txBody>
-          <a:bodyPr wrap="square">
-            <a:spAutoFit/>
-          </a:bodyPr>
-          <a:lstStyle/>
-          <a:p>
-            <a:pPr>
-              <a:defRPr sz="1000" b="1">
-                <a:solidFill>
-                  <a:srgbClr val="0284C7"/>
-                </a:solidFill>
-              </a:defRPr>
-            </a:pPr>
-            <a:r>
-              <a:t>ACCENTURE INNOVATION CHALLENGE 2026</a:t>
-            </a:r>
-          </a:p>
-        </p:txBody>
-      </p:sp>
-      <p:sp>
-        <p:nvSpPr>
-          <p:cNvPr id="4" name="TextBox 3"/>
-          <p:cNvSpPr txBox="1"/>
+          <p:cNvPr id="3" name="Rectangle 2"/>
+          <p:cNvSpPr/>
           <p:nvPr/>
         </p:nvSpPr>
         <p:spPr>
           <a:xfrm>
             <a:off x="731520" y="731520"/>
-            <a:ext cx="10698480" cy="548640"/>
-          </a:xfrm>
-          <a:prstGeom prst="rect">
-            <a:avLst/>
-          </a:prstGeom>
-          <a:noFill/>
-        </p:spPr>
-        <p:txBody>
-          <a:bodyPr wrap="square">
-            <a:spAutoFit/>
-          </a:bodyPr>
-          <a:lstStyle/>
-          <a:p>
-            <a:pPr>
-              <a:defRPr sz="2200" b="1">
-                <a:solidFill>
-                  <a:srgbClr val="FFFFFF"/>
-                </a:solidFill>
-              </a:defRPr>
-            </a:pPr>
-            <a:r>
-              <a:t>System Architecture: 3-Tier Layered Safety &amp; The Attention Gap</a:t>
-            </a:r>
-          </a:p>
-        </p:txBody>
-      </p:sp>
-      <p:sp>
-        <p:nvSpPr>
-          <p:cNvPr id="5" name="Rounded Rectangle 4"/>
-          <p:cNvSpPr/>
-          <p:nvPr/>
-        </p:nvSpPr>
-        <p:spPr>
-          <a:xfrm>
-            <a:off x="731520" y="1554480"/>
-            <a:ext cx="3474720" cy="4754880"/>
-          </a:xfrm>
-          <a:prstGeom prst="roundRect">
-            <a:avLst/>
-          </a:prstGeom>
-          <a:solidFill>
-            <a:srgbClr val="1E293B"/>
-          </a:solidFill>
-          <a:ln w="19050">
-            <a:solidFill>
-              <a:srgbClr val="E11D48"/>
-            </a:solidFill>
-          </a:ln>
-        </p:spPr>
-        <p:style>
-          <a:lnRef idx="1">
-            <a:schemeClr val="accent1"/>
-          </a:lnRef>
-          <a:fillRef idx="3">
-            <a:schemeClr val="accent1"/>
-          </a:fillRef>
-          <a:effectRef idx="2">
-            <a:schemeClr val="accent1"/>
-          </a:effectRef>
-          <a:fontRef idx="minor">
-            <a:schemeClr val="lt1"/>
-          </a:fontRef>
-        </p:style>
-        <p:txBody>
-          <a:bodyPr rtlCol="0" anchor="ctr"/>
-          <a:lstStyle/>
-          <a:p>
-            <a:pPr algn="ctr"/>
-          </a:p>
-        </p:txBody>
-      </p:sp>
-      <p:sp>
-        <p:nvSpPr>
-          <p:cNvPr id="6" name="TextBox 5"/>
-          <p:cNvSpPr txBox="1"/>
-          <p:nvPr/>
-        </p:nvSpPr>
-        <p:spPr>
-          <a:xfrm>
-            <a:off x="914400" y="1737360"/>
-            <a:ext cx="3108960" cy="4389120"/>
-          </a:xfrm>
-          <a:prstGeom prst="rect">
-            <a:avLst/>
-          </a:prstGeom>
-          <a:noFill/>
-        </p:spPr>
-        <p:txBody>
-          <a:bodyPr wrap="square">
-            <a:spAutoFit/>
-          </a:bodyPr>
-          <a:lstStyle/>
-          <a:p>
-            <a:pPr>
-              <a:defRPr sz="1300" b="1">
-                <a:solidFill>
-                  <a:srgbClr val="E11D48"/>
-                </a:solidFill>
-              </a:defRPr>
-            </a:pPr>
-            <a:r>
-              <a:t>TIER 1: DETERMINISTIC GUARDRAILS</a:t>
-            </a:r>
-          </a:p>
-          <a:p>
-            <a:pPr>
-              <a:spcBef>
-                <a:spcPts val="1000"/>
-              </a:spcBef>
-              <a:defRPr sz="1050">
-                <a:solidFill>
-                  <a:srgbClr val="FFFFFF"/>
-                </a:solidFill>
-              </a:defRPr>
-            </a:pPr>
-            <a:r>
-              <a:t>• Hard clinical red-flags (SpO₂ &lt; 85%, SBP &lt; 75 mmHg, Stroke FAST, stridor)</a:t>
-            </a:r>
-            <a:br/>
-            <a:r>
-              <a:t>• 100% Downgrade Guardrails (prevent unsafe score lowering without evidence)</a:t>
-            </a:r>
-          </a:p>
-        </p:txBody>
-      </p:sp>
-      <p:sp>
-        <p:nvSpPr>
-          <p:cNvPr id="7" name="Rounded Rectangle 6"/>
-          <p:cNvSpPr/>
-          <p:nvPr/>
-        </p:nvSpPr>
-        <p:spPr>
-          <a:xfrm>
-            <a:off x="4343400" y="1554480"/>
-            <a:ext cx="3474720" cy="4754880"/>
-          </a:xfrm>
-          <a:prstGeom prst="roundRect">
-            <a:avLst/>
-          </a:prstGeom>
-          <a:solidFill>
-            <a:srgbClr val="1E293B"/>
-          </a:solidFill>
-          <a:ln w="19050">
-            <a:solidFill>
-              <a:srgbClr val="0284C7"/>
-            </a:solidFill>
-          </a:ln>
-        </p:spPr>
-        <p:style>
-          <a:lnRef idx="1">
-            <a:schemeClr val="accent1"/>
-          </a:lnRef>
-          <a:fillRef idx="3">
-            <a:schemeClr val="accent1"/>
-          </a:fillRef>
-          <a:effectRef idx="2">
-            <a:schemeClr val="accent1"/>
-          </a:effectRef>
-          <a:fontRef idx="minor">
-            <a:schemeClr val="lt1"/>
-          </a:fontRef>
-        </p:style>
-        <p:txBody>
-          <a:bodyPr rtlCol="0" anchor="ctr"/>
-          <a:lstStyle/>
-          <a:p>
-            <a:pPr algn="ctr"/>
-          </a:p>
-        </p:txBody>
-      </p:sp>
-      <p:sp>
-        <p:nvSpPr>
-          <p:cNvPr id="8" name="TextBox 7"/>
-          <p:cNvSpPr txBox="1"/>
-          <p:nvPr/>
-        </p:nvSpPr>
-        <p:spPr>
-          <a:xfrm>
-            <a:off x="4526280" y="1737360"/>
-            <a:ext cx="3108960" cy="4389120"/>
-          </a:xfrm>
-          <a:prstGeom prst="rect">
-            <a:avLst/>
-          </a:prstGeom>
-          <a:noFill/>
-        </p:spPr>
-        <p:txBody>
-          <a:bodyPr wrap="square">
-            <a:spAutoFit/>
-          </a:bodyPr>
-          <a:lstStyle/>
-          <a:p>
-            <a:pPr>
-              <a:defRPr sz="1300" b="1">
-                <a:solidFill>
-                  <a:srgbClr val="0284C7"/>
-                </a:solidFill>
-              </a:defRPr>
-            </a:pPr>
-            <a:r>
-              <a:t>TIER 2: AI TRAJECTORY &amp; ATTENTION GAP</a:t>
-            </a:r>
-          </a:p>
-          <a:p>
-            <a:pPr>
-              <a:spcBef>
-                <a:spcPts val="1000"/>
-              </a:spcBef>
-              <a:defRPr sz="1050">
-                <a:solidFill>
-                  <a:srgbClr val="FFFFFF"/>
-                </a:solidFill>
-              </a:defRPr>
-            </a:pPr>
-            <a:r>
-              <a:t>• Priority = Base Risk + Vital Velocity (ΔV) + Evidence Staleness (τ) + Uncertainty (Unknown≠Safe) - Physician Coverage (wc)</a:t>
-            </a:r>
-            <a:br/>
-            <a:r>
-              <a:t>• 108 EMS Pre-Arrival Ingestion via HL7 FHIR LOINC</a:t>
-            </a:r>
-            <a:br/>
-            <a:r>
-              <a:t>• Referral Eligibility Scoring (RES 0–100%)</a:t>
-            </a:r>
-          </a:p>
-        </p:txBody>
-      </p:sp>
-      <p:sp>
-        <p:nvSpPr>
-          <p:cNvPr id="9" name="Rounded Rectangle 8"/>
-          <p:cNvSpPr/>
-          <p:nvPr/>
-        </p:nvSpPr>
-        <p:spPr>
-          <a:xfrm>
-            <a:off x="7955280" y="1554480"/>
-            <a:ext cx="3474720" cy="4754880"/>
-          </a:xfrm>
-          <a:prstGeom prst="roundRect">
-            <a:avLst/>
-          </a:prstGeom>
-          <a:solidFill>
-            <a:srgbClr val="1E293B"/>
-          </a:solidFill>
-          <a:ln w="19050">
-            <a:solidFill>
-              <a:srgbClr val="10B981"/>
-            </a:solidFill>
-          </a:ln>
-        </p:spPr>
-        <p:style>
-          <a:lnRef idx="1">
-            <a:schemeClr val="accent1"/>
-          </a:lnRef>
-          <a:fillRef idx="3">
-            <a:schemeClr val="accent1"/>
-          </a:fillRef>
-          <a:effectRef idx="2">
-            <a:schemeClr val="accent1"/>
-          </a:effectRef>
-          <a:fontRef idx="minor">
-            <a:schemeClr val="lt1"/>
-          </a:fontRef>
-        </p:style>
-        <p:txBody>
-          <a:bodyPr rtlCol="0" anchor="ctr"/>
-          <a:lstStyle/>
-          <a:p>
-            <a:pPr algn="ctr"/>
-          </a:p>
-        </p:txBody>
-      </p:sp>
-      <p:sp>
-        <p:nvSpPr>
-          <p:cNvPr id="10" name="TextBox 9"/>
-          <p:cNvSpPr txBox="1"/>
-          <p:nvPr/>
-        </p:nvSpPr>
-        <p:spPr>
-          <a:xfrm>
-            <a:off x="8138160" y="1737360"/>
-            <a:ext cx="3108960" cy="4389120"/>
-          </a:xfrm>
-          <a:prstGeom prst="rect">
-            <a:avLst/>
-          </a:prstGeom>
-          <a:noFill/>
-        </p:spPr>
-        <p:txBody>
-          <a:bodyPr wrap="square">
-            <a:spAutoFit/>
-          </a:bodyPr>
-          <a:lstStyle/>
-          <a:p>
-            <a:pPr>
-              <a:defRPr sz="1300" b="1">
-                <a:solidFill>
-                  <a:srgbClr val="10B981"/>
-                </a:solidFill>
-              </a:defRPr>
-            </a:pPr>
-            <a:r>
-              <a:t>TIER 3: MULTI-SURFACE DISPATCH &amp; GOVERNANCE</a:t>
-            </a:r>
-          </a:p>
-          <a:p>
-            <a:pPr>
-              <a:spcBef>
-                <a:spcPts val="1000"/>
-              </a:spcBef>
-              <a:defRPr sz="1050">
-                <a:solidFill>
-                  <a:srgbClr val="FFFFFF"/>
-                </a:solidFill>
-              </a:defRPr>
-            </a:pPr>
-            <a:r>
-              <a:t>• 4 Clinical Workspaces: Overview, Nurse Tasks, Floor Map, Lab Orders</a:t>
-            </a:r>
-            <a:br/>
-            <a:r>
-              <a:t>• Unified slide-over Patient Drawer with human-readable 'Why?'</a:t>
-            </a:r>
-            <a:br/>
-            <a:r>
-              <a:t>• 100% Clinician override authority + Immutable append-only audit trail</a:t>
-            </a:r>
-          </a:p>
-        </p:txBody>
-      </p:sp>
-    </p:spTree>
-  </p:cSld>
-  <p:clrMapOvr>
-    <a:masterClrMapping/>
-  </p:clrMapOvr>
-</p:sld>
-</file>
-
-<file path=ppt/slides/slide4.xml><?xml version="1.0" encoding="utf-8"?>
-<p:sld xmlns:a="http://schemas.openxmlformats.org/drawingml/2006/main" xmlns:p="http://schemas.openxmlformats.org/presentationml/2006/main" xmlns:r="http://schemas.openxmlformats.org/officeDocument/2006/relationships">
-  <p:cSld>
-    <p:spTree>
-      <p:nvGrpSpPr>
-        <p:cNvPr id="1" name=""/>
-        <p:cNvGrpSpPr/>
-        <p:nvPr/>
-      </p:nvGrpSpPr>
-      <p:grpSpPr/>
-      <p:sp>
-        <p:nvSpPr>
-          <p:cNvPr id="2" name="Rectangle 1"/>
-          <p:cNvSpPr/>
-          <p:nvPr/>
-        </p:nvSpPr>
-        <p:spPr>
-          <a:xfrm>
-            <a:off x="0" y="0"/>
-            <a:ext cx="12191695" cy="6858000"/>
+            <a:ext cx="10728655" cy="594360"/>
           </a:xfrm>
           <a:prstGeom prst="rect">
             <a:avLst/>
           </a:prstGeom>
           <a:solidFill>
-            <a:srgbClr val="0F172A"/>
+            <a:srgbClr val="A800FF"/>
           </a:solidFill>
           <a:ln>
             <a:noFill/>
@@ -4635,23 +4111,32 @@
           </a:fontRef>
         </p:style>
         <p:txBody>
-          <a:bodyPr rtlCol="0" anchor="ctr"/>
-          <a:lstStyle/>
-          <a:p>
-            <a:pPr algn="ctr"/>
-          </a:p>
-        </p:txBody>
-      </p:sp>
-      <p:sp>
-        <p:nvSpPr>
-          <p:cNvPr id="3" name="TextBox 2"/>
+          <a:bodyPr rtlCol="0" anchor="ctr" wrap="square"/>
+          <a:lstStyle/>
+          <a:p>
+            <a:pPr algn="l">
+              <a:defRPr sz="2000" b="1">
+                <a:solidFill>
+                  <a:srgbClr val="FFFFFF"/>
+                </a:solidFill>
+              </a:defRPr>
+            </a:pPr>
+            <a:r>
+              <a:t> Video</a:t>
+            </a:r>
+          </a:p>
+        </p:txBody>
+      </p:sp>
+      <p:sp>
+        <p:nvSpPr>
+          <p:cNvPr id="4" name="TextBox 3"/>
           <p:cNvSpPr txBox="1"/>
           <p:nvPr/>
         </p:nvSpPr>
         <p:spPr>
           <a:xfrm>
-            <a:off x="731520" y="457200"/>
-            <a:ext cx="10698480" cy="320040"/>
+            <a:off x="731520" y="2011680"/>
+            <a:ext cx="10728655" cy="2743200"/>
           </a:xfrm>
           <a:prstGeom prst="rect">
             <a:avLst/>
@@ -4665,2128 +4150,30 @@
           <a:lstStyle/>
           <a:p>
             <a:pPr>
-              <a:defRPr sz="1000" b="1">
+              <a:defRPr sz="1600" b="1" u="sng">
                 <a:solidFill>
-                  <a:srgbClr val="0284C7"/>
+                  <a:srgbClr val="2563EB"/>
                 </a:solidFill>
               </a:defRPr>
             </a:pPr>
             <a:r>
-              <a:t>ACCENTURE INNOVATION CHALLENGE 2026</a:t>
-            </a:r>
-          </a:p>
-        </p:txBody>
-      </p:sp>
-      <p:sp>
-        <p:nvSpPr>
-          <p:cNvPr id="4" name="TextBox 3"/>
-          <p:cNvSpPr txBox="1"/>
-          <p:nvPr/>
-        </p:nvSpPr>
-        <p:spPr>
-          <a:xfrm>
-            <a:off x="731520" y="731520"/>
-            <a:ext cx="10698480" cy="548640"/>
-          </a:xfrm>
-          <a:prstGeom prst="rect">
-            <a:avLst/>
-          </a:prstGeom>
-          <a:noFill/>
-        </p:spPr>
-        <p:txBody>
-          <a:bodyPr wrap="square">
-            <a:spAutoFit/>
-          </a:bodyPr>
-          <a:lstStyle/>
-          <a:p>
+              <a:t>https://drive.google.com/drive/folders/1qeAV4E03yaVNREZVVUIRtUZ2KoMC7Ptg?usp=sharing</a:t>
+            </a:r>
+          </a:p>
+          <a:p>
+            <a:br/>
             <a:pPr>
-              <a:defRPr sz="2200" b="1">
+              <a:spcBef>
+                <a:spcPts val="1400"/>
+              </a:spcBef>
+              <a:defRPr sz="1400">
                 <a:solidFill>
-                  <a:srgbClr val="FFFFFF"/>
+                  <a:srgbClr val="64748B"/>
                 </a:solidFill>
               </a:defRPr>
             </a:pPr>
             <a:r>
-              <a:t>The Clinical Cockpit: 4 Switchable Workspaces</a:t>
-            </a:r>
-          </a:p>
-        </p:txBody>
-      </p:sp>
-      <p:sp>
-        <p:nvSpPr>
-          <p:cNvPr id="5" name="Rounded Rectangle 4"/>
-          <p:cNvSpPr/>
-          <p:nvPr/>
-        </p:nvSpPr>
-        <p:spPr>
-          <a:xfrm>
-            <a:off x="731520" y="1554480"/>
-            <a:ext cx="5257800" cy="2148840"/>
-          </a:xfrm>
-          <a:prstGeom prst="roundRect">
-            <a:avLst/>
-          </a:prstGeom>
-          <a:solidFill>
-            <a:srgbClr val="1E293B"/>
-          </a:solidFill>
-          <a:ln w="19050">
-            <a:solidFill>
-              <a:srgbClr val="0284C7"/>
-            </a:solidFill>
-          </a:ln>
-        </p:spPr>
-        <p:style>
-          <a:lnRef idx="1">
-            <a:schemeClr val="accent1"/>
-          </a:lnRef>
-          <a:fillRef idx="3">
-            <a:schemeClr val="accent1"/>
-          </a:fillRef>
-          <a:effectRef idx="2">
-            <a:schemeClr val="accent1"/>
-          </a:effectRef>
-          <a:fontRef idx="minor">
-            <a:schemeClr val="lt1"/>
-          </a:fontRef>
-        </p:style>
-        <p:txBody>
-          <a:bodyPr rtlCol="0" anchor="ctr"/>
-          <a:lstStyle/>
-          <a:p>
-            <a:pPr algn="ctr"/>
-          </a:p>
-        </p:txBody>
-      </p:sp>
-      <p:sp>
-        <p:nvSpPr>
-          <p:cNvPr id="6" name="TextBox 5"/>
-          <p:cNvSpPr txBox="1"/>
-          <p:nvPr/>
-        </p:nvSpPr>
-        <p:spPr>
-          <a:xfrm>
-            <a:off x="960120" y="1737360"/>
-            <a:ext cx="4800600" cy="1783080"/>
-          </a:xfrm>
-          <a:prstGeom prst="rect">
-            <a:avLst/>
-          </a:prstGeom>
-          <a:noFill/>
-        </p:spPr>
-        <p:txBody>
-          <a:bodyPr wrap="square">
-            <a:spAutoFit/>
-          </a:bodyPr>
-          <a:lstStyle/>
-          <a:p>
-            <a:pPr>
-              <a:defRPr sz="1600" b="1">
-                <a:solidFill>
-                  <a:srgbClr val="0284C7"/>
-                </a:solidFill>
-              </a:defRPr>
-            </a:pPr>
-            <a:r>
-              <a:t>🧭 1. Overview (Control Tower)</a:t>
-            </a:r>
-          </a:p>
-          <a:p>
-            <a:pPr>
-              <a:spcBef>
-                <a:spcPts val="800"/>
-              </a:spcBef>
-              <a:defRPr sz="1100">
-                <a:solidFill>
-                  <a:srgbClr val="FFFFFF"/>
-                </a:solidFill>
-              </a:defRPr>
-            </a:pPr>
-            <a:r>
-              <a:t>Dynamic Priority Stream continuously re-ranking patients by unmet clinical need + Searchable census + Live audit feed.</a:t>
-            </a:r>
-          </a:p>
-        </p:txBody>
-      </p:sp>
-      <p:sp>
-        <p:nvSpPr>
-          <p:cNvPr id="7" name="Rounded Rectangle 6"/>
-          <p:cNvSpPr/>
-          <p:nvPr/>
-        </p:nvSpPr>
-        <p:spPr>
-          <a:xfrm>
-            <a:off x="6172200" y="1554480"/>
-            <a:ext cx="5257800" cy="2148840"/>
-          </a:xfrm>
-          <a:prstGeom prst="roundRect">
-            <a:avLst/>
-          </a:prstGeom>
-          <a:solidFill>
-            <a:srgbClr val="1E293B"/>
-          </a:solidFill>
-          <a:ln w="19050">
-            <a:solidFill>
-              <a:srgbClr val="E11D48"/>
-            </a:solidFill>
-          </a:ln>
-        </p:spPr>
-        <p:style>
-          <a:lnRef idx="1">
-            <a:schemeClr val="accent1"/>
-          </a:lnRef>
-          <a:fillRef idx="3">
-            <a:schemeClr val="accent1"/>
-          </a:fillRef>
-          <a:effectRef idx="2">
-            <a:schemeClr val="accent1"/>
-          </a:effectRef>
-          <a:fontRef idx="minor">
-            <a:schemeClr val="lt1"/>
-          </a:fontRef>
-        </p:style>
-        <p:txBody>
-          <a:bodyPr rtlCol="0" anchor="ctr"/>
-          <a:lstStyle/>
-          <a:p>
-            <a:pPr algn="ctr"/>
-          </a:p>
-        </p:txBody>
-      </p:sp>
-      <p:sp>
-        <p:nvSpPr>
-          <p:cNvPr id="8" name="TextBox 7"/>
-          <p:cNvSpPr txBox="1"/>
-          <p:nvPr/>
-        </p:nvSpPr>
-        <p:spPr>
-          <a:xfrm>
-            <a:off x="6400800" y="1737360"/>
-            <a:ext cx="4800600" cy="1783080"/>
-          </a:xfrm>
-          <a:prstGeom prst="rect">
-            <a:avLst/>
-          </a:prstGeom>
-          <a:noFill/>
-        </p:spPr>
-        <p:txBody>
-          <a:bodyPr wrap="square">
-            <a:spAutoFit/>
-          </a:bodyPr>
-          <a:lstStyle/>
-          <a:p>
-            <a:pPr>
-              <a:defRPr sz="1600" b="1">
-                <a:solidFill>
-                  <a:srgbClr val="E11D48"/>
-                </a:solidFill>
-              </a:defRPr>
-            </a:pPr>
-            <a:r>
-              <a:t>🩺 2. Nurse Tasks ('Next 5 Mins')</a:t>
-            </a:r>
-          </a:p>
-          <a:p>
-            <a:pPr>
-              <a:spcBef>
-                <a:spcPts val="800"/>
-              </a:spcBef>
-              <a:defRPr sz="1100">
-                <a:solidFill>
-                  <a:srgbClr val="FFFFFF"/>
-                </a:solidFill>
-              </a:defRPr>
-            </a:pPr>
-            <a:r>
-              <a:t>Time-budgeted micro-tasks (90s, 60s, 45s, 30s) converting abstract scores into direct bedside clinical actions + 'Attendant Away' spot-checks.</a:t>
-            </a:r>
-          </a:p>
-        </p:txBody>
-      </p:sp>
-      <p:sp>
-        <p:nvSpPr>
-          <p:cNvPr id="9" name="Rounded Rectangle 8"/>
-          <p:cNvSpPr/>
-          <p:nvPr/>
-        </p:nvSpPr>
-        <p:spPr>
-          <a:xfrm>
-            <a:off x="731520" y="3931920"/>
-            <a:ext cx="5257800" cy="2148840"/>
-          </a:xfrm>
-          <a:prstGeom prst="roundRect">
-            <a:avLst/>
-          </a:prstGeom>
-          <a:solidFill>
-            <a:srgbClr val="1E293B"/>
-          </a:solidFill>
-          <a:ln w="19050">
-            <a:solidFill>
-              <a:srgbClr val="F59E0B"/>
-            </a:solidFill>
-          </a:ln>
-        </p:spPr>
-        <p:style>
-          <a:lnRef idx="1">
-            <a:schemeClr val="accent1"/>
-          </a:lnRef>
-          <a:fillRef idx="3">
-            <a:schemeClr val="accent1"/>
-          </a:fillRef>
-          <a:effectRef idx="2">
-            <a:schemeClr val="accent1"/>
-          </a:effectRef>
-          <a:fontRef idx="minor">
-            <a:schemeClr val="lt1"/>
-          </a:fontRef>
-        </p:style>
-        <p:txBody>
-          <a:bodyPr rtlCol="0" anchor="ctr"/>
-          <a:lstStyle/>
-          <a:p>
-            <a:pPr algn="ctr"/>
-          </a:p>
-        </p:txBody>
-      </p:sp>
-      <p:sp>
-        <p:nvSpPr>
-          <p:cNvPr id="10" name="TextBox 9"/>
-          <p:cNvSpPr txBox="1"/>
-          <p:nvPr/>
-        </p:nvSpPr>
-        <p:spPr>
-          <a:xfrm>
-            <a:off x="960120" y="4114800"/>
-            <a:ext cx="4800600" cy="1783080"/>
-          </a:xfrm>
-          <a:prstGeom prst="rect">
-            <a:avLst/>
-          </a:prstGeom>
-          <a:noFill/>
-        </p:spPr>
-        <p:txBody>
-          <a:bodyPr wrap="square">
-            <a:spAutoFit/>
-          </a:bodyPr>
-          <a:lstStyle/>
-          <a:p>
-            <a:pPr>
-              <a:defRPr sz="1600" b="1">
-                <a:solidFill>
-                  <a:srgbClr val="F59E0B"/>
-                </a:solidFill>
-              </a:defRPr>
-            </a:pPr>
-            <a:r>
-              <a:t>🗺️ 3. ED Floor Pressure Map</a:t>
-            </a:r>
-          </a:p>
-          <a:p>
-            <a:pPr>
-              <a:spcBef>
-                <a:spcPts val="800"/>
-              </a:spcBef>
-              <a:defRPr sz="1100">
-                <a:solidFill>
-                  <a:srgbClr val="FFFFFF"/>
-                </a:solidFill>
-              </a:defRPr>
-            </a:pPr>
-            <a:r>
-              <a:t>Real-time spatial visualization of Waiting Lounge Chairs 1–20 (pulsing halos 🟢/🟡/🟠/🔴) vs Treatment Bays + Unaccompanied patient alerts.</a:t>
-            </a:r>
-          </a:p>
-        </p:txBody>
-      </p:sp>
-      <p:sp>
-        <p:nvSpPr>
-          <p:cNvPr id="11" name="Rounded Rectangle 10"/>
-          <p:cNvSpPr/>
-          <p:nvPr/>
-        </p:nvSpPr>
-        <p:spPr>
-          <a:xfrm>
-            <a:off x="6172200" y="3931920"/>
-            <a:ext cx="5257800" cy="2148840"/>
-          </a:xfrm>
-          <a:prstGeom prst="roundRect">
-            <a:avLst/>
-          </a:prstGeom>
-          <a:solidFill>
-            <a:srgbClr val="1E293B"/>
-          </a:solidFill>
-          <a:ln w="19050">
-            <a:solidFill>
-              <a:srgbClr val="10B981"/>
-            </a:solidFill>
-          </a:ln>
-        </p:spPr>
-        <p:style>
-          <a:lnRef idx="1">
-            <a:schemeClr val="accent1"/>
-          </a:lnRef>
-          <a:fillRef idx="3">
-            <a:schemeClr val="accent1"/>
-          </a:fillRef>
-          <a:effectRef idx="2">
-            <a:schemeClr val="accent1"/>
-          </a:effectRef>
-          <a:fontRef idx="minor">
-            <a:schemeClr val="lt1"/>
-          </a:fontRef>
-        </p:style>
-        <p:txBody>
-          <a:bodyPr rtlCol="0" anchor="ctr"/>
-          <a:lstStyle/>
-          <a:p>
-            <a:pPr algn="ctr"/>
-          </a:p>
-        </p:txBody>
-      </p:sp>
-      <p:sp>
-        <p:nvSpPr>
-          <p:cNvPr id="12" name="TextBox 11"/>
-          <p:cNvSpPr txBox="1"/>
-          <p:nvPr/>
-        </p:nvSpPr>
-        <p:spPr>
-          <a:xfrm>
-            <a:off x="6400800" y="4114800"/>
-            <a:ext cx="4800600" cy="1783080"/>
-          </a:xfrm>
-          <a:prstGeom prst="rect">
-            <a:avLst/>
-          </a:prstGeom>
-          <a:noFill/>
-        </p:spPr>
-        <p:txBody>
-          <a:bodyPr wrap="square">
-            <a:spAutoFit/>
-          </a:bodyPr>
-          <a:lstStyle/>
-          <a:p>
-            <a:pPr>
-              <a:defRPr sz="1600" b="1">
-                <a:solidFill>
-                  <a:srgbClr val="10B981"/>
-                </a:solidFill>
-              </a:defRPr>
-            </a:pPr>
-            <a:r>
-              <a:t>🧪 4. Standing Lab Pre-Orders Hub</a:t>
-            </a:r>
-          </a:p>
-          <a:p>
-            <a:pPr>
-              <a:spcBef>
-                <a:spcPts val="800"/>
-              </a:spcBef>
-              <a:defRPr sz="1100">
-                <a:solidFill>
-                  <a:srgbClr val="FFFFFF"/>
-                </a:solidFill>
-              </a:defRPr>
-            </a:pPr>
-            <a:r>
-              <a:t>Auto-drafts Troponin+ECG and Lactate orders before MD assignment with 1-click approval, cutting diagnostic turnaround time by 18 minutes.</a:t>
-            </a:r>
-          </a:p>
-        </p:txBody>
-      </p:sp>
-    </p:spTree>
-  </p:cSld>
-  <p:clrMapOvr>
-    <a:masterClrMapping/>
-  </p:clrMapOvr>
-</p:sld>
-</file>
-
-<file path=ppt/slides/slide5.xml><?xml version="1.0" encoding="utf-8"?>
-<p:sld xmlns:a="http://schemas.openxmlformats.org/drawingml/2006/main" xmlns:p="http://schemas.openxmlformats.org/presentationml/2006/main" xmlns:r="http://schemas.openxmlformats.org/officeDocument/2006/relationships">
-  <p:cSld>
-    <p:spTree>
-      <p:nvGrpSpPr>
-        <p:cNvPr id="1" name=""/>
-        <p:cNvGrpSpPr/>
-        <p:nvPr/>
-      </p:nvGrpSpPr>
-      <p:grpSpPr/>
-      <p:sp>
-        <p:nvSpPr>
-          <p:cNvPr id="2" name="Rectangle 1"/>
-          <p:cNvSpPr/>
-          <p:nvPr/>
-        </p:nvSpPr>
-        <p:spPr>
-          <a:xfrm>
-            <a:off x="0" y="0"/>
-            <a:ext cx="12191695" cy="6858000"/>
-          </a:xfrm>
-          <a:prstGeom prst="rect">
-            <a:avLst/>
-          </a:prstGeom>
-          <a:solidFill>
-            <a:srgbClr val="0F172A"/>
-          </a:solidFill>
-          <a:ln>
-            <a:noFill/>
-          </a:ln>
-        </p:spPr>
-        <p:style>
-          <a:lnRef idx="1">
-            <a:schemeClr val="accent1"/>
-          </a:lnRef>
-          <a:fillRef idx="3">
-            <a:schemeClr val="accent1"/>
-          </a:fillRef>
-          <a:effectRef idx="2">
-            <a:schemeClr val="accent1"/>
-          </a:effectRef>
-          <a:fontRef idx="minor">
-            <a:schemeClr val="lt1"/>
-          </a:fontRef>
-        </p:style>
-        <p:txBody>
-          <a:bodyPr rtlCol="0" anchor="ctr"/>
-          <a:lstStyle/>
-          <a:p>
-            <a:pPr algn="ctr"/>
-          </a:p>
-        </p:txBody>
-      </p:sp>
-      <p:sp>
-        <p:nvSpPr>
-          <p:cNvPr id="3" name="TextBox 2"/>
-          <p:cNvSpPr txBox="1"/>
-          <p:nvPr/>
-        </p:nvSpPr>
-        <p:spPr>
-          <a:xfrm>
-            <a:off x="731520" y="457200"/>
-            <a:ext cx="10698480" cy="320040"/>
-          </a:xfrm>
-          <a:prstGeom prst="rect">
-            <a:avLst/>
-          </a:prstGeom>
-          <a:noFill/>
-        </p:spPr>
-        <p:txBody>
-          <a:bodyPr wrap="square">
-            <a:spAutoFit/>
-          </a:bodyPr>
-          <a:lstStyle/>
-          <a:p>
-            <a:pPr>
-              <a:defRPr sz="1000" b="1">
-                <a:solidFill>
-                  <a:srgbClr val="0284C7"/>
-                </a:solidFill>
-              </a:defRPr>
-            </a:pPr>
-            <a:r>
-              <a:t>ACCENTURE INNOVATION CHALLENGE 2026</a:t>
-            </a:r>
-          </a:p>
-        </p:txBody>
-      </p:sp>
-      <p:sp>
-        <p:nvSpPr>
-          <p:cNvPr id="4" name="TextBox 3"/>
-          <p:cNvSpPr txBox="1"/>
-          <p:nvPr/>
-        </p:nvSpPr>
-        <p:spPr>
-          <a:xfrm>
-            <a:off x="731520" y="731520"/>
-            <a:ext cx="10698480" cy="548640"/>
-          </a:xfrm>
-          <a:prstGeom prst="rect">
-            <a:avLst/>
-          </a:prstGeom>
-          <a:noFill/>
-        </p:spPr>
-        <p:txBody>
-          <a:bodyPr wrap="square">
-            <a:spAutoFit/>
-          </a:bodyPr>
-          <a:lstStyle/>
-          <a:p>
-            <a:pPr>
-              <a:defRPr sz="2200" b="1">
-                <a:solidFill>
-                  <a:srgbClr val="FFFFFF"/>
-                </a:solidFill>
-              </a:defRPr>
-            </a:pPr>
-            <a:r>
-              <a:t>Patient Transparency Companion: Reducing Anxiety &amp; LWBS</a:t>
-            </a:r>
-          </a:p>
-        </p:txBody>
-      </p:sp>
-      <p:sp>
-        <p:nvSpPr>
-          <p:cNvPr id="5" name="Rounded Rectangle 4"/>
-          <p:cNvSpPr/>
-          <p:nvPr/>
-        </p:nvSpPr>
-        <p:spPr>
-          <a:xfrm>
-            <a:off x="731520" y="1554480"/>
-            <a:ext cx="5257800" cy="2148840"/>
-          </a:xfrm>
-          <a:prstGeom prst="roundRect">
-            <a:avLst/>
-          </a:prstGeom>
-          <a:solidFill>
-            <a:srgbClr val="1E293B"/>
-          </a:solidFill>
-          <a:ln w="19050">
-            <a:solidFill>
-              <a:srgbClr val="0284C7"/>
-            </a:solidFill>
-          </a:ln>
-        </p:spPr>
-        <p:style>
-          <a:lnRef idx="1">
-            <a:schemeClr val="accent1"/>
-          </a:lnRef>
-          <a:fillRef idx="3">
-            <a:schemeClr val="accent1"/>
-          </a:fillRef>
-          <a:effectRef idx="2">
-            <a:schemeClr val="accent1"/>
-          </a:effectRef>
-          <a:fontRef idx="minor">
-            <a:schemeClr val="lt1"/>
-          </a:fontRef>
-        </p:style>
-        <p:txBody>
-          <a:bodyPr rtlCol="0" anchor="ctr"/>
-          <a:lstStyle/>
-          <a:p>
-            <a:pPr algn="ctr"/>
-          </a:p>
-        </p:txBody>
-      </p:sp>
-      <p:sp>
-        <p:nvSpPr>
-          <p:cNvPr id="6" name="TextBox 5"/>
-          <p:cNvSpPr txBox="1"/>
-          <p:nvPr/>
-        </p:nvSpPr>
-        <p:spPr>
-          <a:xfrm>
-            <a:off x="960120" y="1737360"/>
-            <a:ext cx="4800600" cy="1783080"/>
-          </a:xfrm>
-          <a:prstGeom prst="rect">
-            <a:avLst/>
-          </a:prstGeom>
-          <a:noFill/>
-        </p:spPr>
-        <p:txBody>
-          <a:bodyPr wrap="square">
-            <a:spAutoFit/>
-          </a:bodyPr>
-          <a:lstStyle/>
-          <a:p>
-            <a:pPr>
-              <a:defRPr sz="1600" b="1">
-                <a:solidFill>
-                  <a:srgbClr val="0284C7"/>
-                </a:solidFill>
-              </a:defRPr>
-            </a:pPr>
-            <a:r>
-              <a:t>📱 Zero-App Install (QR Code / SMS)</a:t>
-            </a:r>
-          </a:p>
-          <a:p>
-            <a:pPr>
-              <a:spcBef>
-                <a:spcPts val="800"/>
-              </a:spcBef>
-              <a:defRPr sz="1100">
-                <a:solidFill>
-                  <a:srgbClr val="FFFFFF"/>
-                </a:solidFill>
-              </a:defRPr>
-            </a:pPr>
-            <a:r>
-              <a:t>Waiting patients scan a QR code printed on their triage wristband to access a live, mobile-friendly care journey tracker with zero app downloads.</a:t>
-            </a:r>
-          </a:p>
-        </p:txBody>
-      </p:sp>
-      <p:sp>
-        <p:nvSpPr>
-          <p:cNvPr id="7" name="Rounded Rectangle 6"/>
-          <p:cNvSpPr/>
-          <p:nvPr/>
-        </p:nvSpPr>
-        <p:spPr>
-          <a:xfrm>
-            <a:off x="6172200" y="1554480"/>
-            <a:ext cx="5257800" cy="2148840"/>
-          </a:xfrm>
-          <a:prstGeom prst="roundRect">
-            <a:avLst/>
-          </a:prstGeom>
-          <a:solidFill>
-            <a:srgbClr val="1E293B"/>
-          </a:solidFill>
-          <a:ln w="19050">
-            <a:solidFill>
-              <a:srgbClr val="10B981"/>
-            </a:solidFill>
-          </a:ln>
-        </p:spPr>
-        <p:style>
-          <a:lnRef idx="1">
-            <a:schemeClr val="accent1"/>
-          </a:lnRef>
-          <a:fillRef idx="3">
-            <a:schemeClr val="accent1"/>
-          </a:fillRef>
-          <a:effectRef idx="2">
-            <a:schemeClr val="accent1"/>
-          </a:effectRef>
-          <a:fontRef idx="minor">
-            <a:schemeClr val="lt1"/>
-          </a:fontRef>
-        </p:style>
-        <p:txBody>
-          <a:bodyPr rtlCol="0" anchor="ctr"/>
-          <a:lstStyle/>
-          <a:p>
-            <a:pPr algn="ctr"/>
-          </a:p>
-        </p:txBody>
-      </p:sp>
-      <p:sp>
-        <p:nvSpPr>
-          <p:cNvPr id="8" name="TextBox 7"/>
-          <p:cNvSpPr txBox="1"/>
-          <p:nvPr/>
-        </p:nvSpPr>
-        <p:spPr>
-          <a:xfrm>
-            <a:off x="6400800" y="1737360"/>
-            <a:ext cx="4800600" cy="1783080"/>
-          </a:xfrm>
-          <a:prstGeom prst="rect">
-            <a:avLst/>
-          </a:prstGeom>
-          <a:noFill/>
-        </p:spPr>
-        <p:txBody>
-          <a:bodyPr wrap="square">
-            <a:spAutoFit/>
-          </a:bodyPr>
-          <a:lstStyle/>
-          <a:p>
-            <a:pPr>
-              <a:defRPr sz="1600" b="1">
-                <a:solidFill>
-                  <a:srgbClr val="10B981"/>
-                </a:solidFill>
-              </a:defRPr>
-            </a:pPr>
-            <a:r>
-              <a:t>🤝 Behavioral De-Escalation ('Why Queue Moves')</a:t>
-            </a:r>
-          </a:p>
-          <a:p>
-            <a:pPr>
-              <a:spcBef>
-                <a:spcPts val="800"/>
-              </a:spcBef>
-              <a:defRPr sz="1100">
-                <a:solidFill>
-                  <a:srgbClr val="FFFFFF"/>
-                </a:solidFill>
-              </a:defRPr>
-            </a:pPr>
-            <a:r>
-              <a:t>Directly answers: 'Why did someone who arrived after me get called in first?' — explaining clinical triage acuity without exposing private PHI.</a:t>
-            </a:r>
-          </a:p>
-        </p:txBody>
-      </p:sp>
-      <p:sp>
-        <p:nvSpPr>
-          <p:cNvPr id="9" name="Rounded Rectangle 8"/>
-          <p:cNvSpPr/>
-          <p:nvPr/>
-        </p:nvSpPr>
-        <p:spPr>
-          <a:xfrm>
-            <a:off x="731520" y="3931920"/>
-            <a:ext cx="5257800" cy="2148840"/>
-          </a:xfrm>
-          <a:prstGeom prst="roundRect">
-            <a:avLst/>
-          </a:prstGeom>
-          <a:solidFill>
-            <a:srgbClr val="1E293B"/>
-          </a:solidFill>
-          <a:ln w="19050">
-            <a:solidFill>
-              <a:srgbClr val="F59E0B"/>
-            </a:solidFill>
-          </a:ln>
-        </p:spPr>
-        <p:style>
-          <a:lnRef idx="1">
-            <a:schemeClr val="accent1"/>
-          </a:lnRef>
-          <a:fillRef idx="3">
-            <a:schemeClr val="accent1"/>
-          </a:fillRef>
-          <a:effectRef idx="2">
-            <a:schemeClr val="accent1"/>
-          </a:effectRef>
-          <a:fontRef idx="minor">
-            <a:schemeClr val="lt1"/>
-          </a:fontRef>
-        </p:style>
-        <p:txBody>
-          <a:bodyPr rtlCol="0" anchor="ctr"/>
-          <a:lstStyle/>
-          <a:p>
-            <a:pPr algn="ctr"/>
-          </a:p>
-        </p:txBody>
-      </p:sp>
-      <p:sp>
-        <p:nvSpPr>
-          <p:cNvPr id="10" name="TextBox 9"/>
-          <p:cNvSpPr txBox="1"/>
-          <p:nvPr/>
-        </p:nvSpPr>
-        <p:spPr>
-          <a:xfrm>
-            <a:off x="960120" y="4114800"/>
-            <a:ext cx="4800600" cy="1783080"/>
-          </a:xfrm>
-          <a:prstGeom prst="rect">
-            <a:avLst/>
-          </a:prstGeom>
-          <a:noFill/>
-        </p:spPr>
-        <p:txBody>
-          <a:bodyPr wrap="square">
-            <a:spAutoFit/>
-          </a:bodyPr>
-          <a:lstStyle/>
-          <a:p>
-            <a:pPr>
-              <a:defRPr sz="1600" b="1">
-                <a:solidFill>
-                  <a:srgbClr val="F59E0B"/>
-                </a:solidFill>
-              </a:defRPr>
-            </a:pPr>
-            <a:r>
-              <a:t>⏱️ Next Nurse Re-Check Countdown</a:t>
-            </a:r>
-          </a:p>
-          <a:p>
-            <a:pPr>
-              <a:spcBef>
-                <a:spcPts val="800"/>
-              </a:spcBef>
-              <a:defRPr sz="1100">
-                <a:solidFill>
-                  <a:srgbClr val="FFFFFF"/>
-                </a:solidFill>
-              </a:defRPr>
-            </a:pPr>
-            <a:r>
-              <a:t>Displays a reassuring countdown timer for the next scheduled vital check, eliminating waiting room uncertainty and panic.</a:t>
-            </a:r>
-          </a:p>
-        </p:txBody>
-      </p:sp>
-      <p:sp>
-        <p:nvSpPr>
-          <p:cNvPr id="11" name="Rounded Rectangle 10"/>
-          <p:cNvSpPr/>
-          <p:nvPr/>
-        </p:nvSpPr>
-        <p:spPr>
-          <a:xfrm>
-            <a:off x="6172200" y="3931920"/>
-            <a:ext cx="5257800" cy="2148840"/>
-          </a:xfrm>
-          <a:prstGeom prst="roundRect">
-            <a:avLst/>
-          </a:prstGeom>
-          <a:solidFill>
-            <a:srgbClr val="1E293B"/>
-          </a:solidFill>
-          <a:ln w="19050">
-            <a:solidFill>
-              <a:srgbClr val="E11D48"/>
-            </a:solidFill>
-          </a:ln>
-        </p:spPr>
-        <p:style>
-          <a:lnRef idx="1">
-            <a:schemeClr val="accent1"/>
-          </a:lnRef>
-          <a:fillRef idx="3">
-            <a:schemeClr val="accent1"/>
-          </a:fillRef>
-          <a:effectRef idx="2">
-            <a:schemeClr val="accent1"/>
-          </a:effectRef>
-          <a:fontRef idx="minor">
-            <a:schemeClr val="lt1"/>
-          </a:fontRef>
-        </p:style>
-        <p:txBody>
-          <a:bodyPr rtlCol="0" anchor="ctr"/>
-          <a:lstStyle/>
-          <a:p>
-            <a:pPr algn="ctr"/>
-          </a:p>
-        </p:txBody>
-      </p:sp>
-      <p:sp>
-        <p:nvSpPr>
-          <p:cNvPr id="12" name="TextBox 11"/>
-          <p:cNvSpPr txBox="1"/>
-          <p:nvPr/>
-        </p:nvSpPr>
-        <p:spPr>
-          <a:xfrm>
-            <a:off x="6400800" y="4114800"/>
-            <a:ext cx="4800600" cy="1783080"/>
-          </a:xfrm>
-          <a:prstGeom prst="rect">
-            <a:avLst/>
-          </a:prstGeom>
-          <a:noFill/>
-        </p:spPr>
-        <p:txBody>
-          <a:bodyPr wrap="square">
-            <a:spAutoFit/>
-          </a:bodyPr>
-          <a:lstStyle/>
-          <a:p>
-            <a:pPr>
-              <a:defRPr sz="1600" b="1">
-                <a:solidFill>
-                  <a:srgbClr val="E11D48"/>
-                </a:solidFill>
-              </a:defRPr>
-            </a:pPr>
-            <a:r>
-              <a:t>💰 $1.12M LWBS Revenue Recovery</a:t>
-            </a:r>
-          </a:p>
-          <a:p>
-            <a:pPr>
-              <a:spcBef>
-                <a:spcPts val="800"/>
-              </a:spcBef>
-              <a:defRPr sz="1100">
-                <a:solidFill>
-                  <a:srgbClr val="FFFFFF"/>
-                </a:solidFill>
-              </a:defRPr>
-            </a:pPr>
-            <a:r>
-              <a:t>By keeping waiting patients informed and engaged, reduces Left-Without-Being-Seen (LWBS) walkout rates from 4.8% to &lt;2.9%.</a:t>
-            </a:r>
-          </a:p>
-        </p:txBody>
-      </p:sp>
-    </p:spTree>
-  </p:cSld>
-  <p:clrMapOvr>
-    <a:masterClrMapping/>
-  </p:clrMapOvr>
-</p:sld>
-</file>
-
-<file path=ppt/slides/slide6.xml><?xml version="1.0" encoding="utf-8"?>
-<p:sld xmlns:a="http://schemas.openxmlformats.org/drawingml/2006/main" xmlns:p="http://schemas.openxmlformats.org/presentationml/2006/main" xmlns:r="http://schemas.openxmlformats.org/officeDocument/2006/relationships">
-  <p:cSld>
-    <p:spTree>
-      <p:nvGrpSpPr>
-        <p:cNvPr id="1" name=""/>
-        <p:cNvGrpSpPr/>
-        <p:nvPr/>
-      </p:nvGrpSpPr>
-      <p:grpSpPr/>
-      <p:sp>
-        <p:nvSpPr>
-          <p:cNvPr id="2" name="Rectangle 1"/>
-          <p:cNvSpPr/>
-          <p:nvPr/>
-        </p:nvSpPr>
-        <p:spPr>
-          <a:xfrm>
-            <a:off x="0" y="0"/>
-            <a:ext cx="12191695" cy="6858000"/>
-          </a:xfrm>
-          <a:prstGeom prst="rect">
-            <a:avLst/>
-          </a:prstGeom>
-          <a:solidFill>
-            <a:srgbClr val="0F172A"/>
-          </a:solidFill>
-          <a:ln>
-            <a:noFill/>
-          </a:ln>
-        </p:spPr>
-        <p:style>
-          <a:lnRef idx="1">
-            <a:schemeClr val="accent1"/>
-          </a:lnRef>
-          <a:fillRef idx="3">
-            <a:schemeClr val="accent1"/>
-          </a:fillRef>
-          <a:effectRef idx="2">
-            <a:schemeClr val="accent1"/>
-          </a:effectRef>
-          <a:fontRef idx="minor">
-            <a:schemeClr val="lt1"/>
-          </a:fontRef>
-        </p:style>
-        <p:txBody>
-          <a:bodyPr rtlCol="0" anchor="ctr"/>
-          <a:lstStyle/>
-          <a:p>
-            <a:pPr algn="ctr"/>
-          </a:p>
-        </p:txBody>
-      </p:sp>
-      <p:sp>
-        <p:nvSpPr>
-          <p:cNvPr id="3" name="TextBox 2"/>
-          <p:cNvSpPr txBox="1"/>
-          <p:nvPr/>
-        </p:nvSpPr>
-        <p:spPr>
-          <a:xfrm>
-            <a:off x="731520" y="457200"/>
-            <a:ext cx="10698480" cy="320040"/>
-          </a:xfrm>
-          <a:prstGeom prst="rect">
-            <a:avLst/>
-          </a:prstGeom>
-          <a:noFill/>
-        </p:spPr>
-        <p:txBody>
-          <a:bodyPr wrap="square">
-            <a:spAutoFit/>
-          </a:bodyPr>
-          <a:lstStyle/>
-          <a:p>
-            <a:pPr>
-              <a:defRPr sz="1000" b="1">
-                <a:solidFill>
-                  <a:srgbClr val="0284C7"/>
-                </a:solidFill>
-              </a:defRPr>
-            </a:pPr>
-            <a:r>
-              <a:t>ACCENTURE INNOVATION CHALLENGE 2026</a:t>
-            </a:r>
-          </a:p>
-        </p:txBody>
-      </p:sp>
-      <p:sp>
-        <p:nvSpPr>
-          <p:cNvPr id="4" name="TextBox 3"/>
-          <p:cNvSpPr txBox="1"/>
-          <p:nvPr/>
-        </p:nvSpPr>
-        <p:spPr>
-          <a:xfrm>
-            <a:off x="731520" y="731520"/>
-            <a:ext cx="10698480" cy="548640"/>
-          </a:xfrm>
-          <a:prstGeom prst="rect">
-            <a:avLst/>
-          </a:prstGeom>
-          <a:noFill/>
-        </p:spPr>
-        <p:txBody>
-          <a:bodyPr wrap="square">
-            <a:spAutoFit/>
-          </a:bodyPr>
-          <a:lstStyle/>
-          <a:p>
-            <a:pPr>
-              <a:defRPr sz="2200" b="1">
-                <a:solidFill>
-                  <a:srgbClr val="FFFFFF"/>
-                </a:solidFill>
-              </a:defRPr>
-            </a:pPr>
-            <a:r>
-              <a:t>Quantified Hospital Business Case &amp; ROI ($3.82M Net Annual Value)</a:t>
-            </a:r>
-          </a:p>
-        </p:txBody>
-      </p:sp>
-      <p:sp>
-        <p:nvSpPr>
-          <p:cNvPr id="5" name="Rounded Rectangle 4"/>
-          <p:cNvSpPr/>
-          <p:nvPr/>
-        </p:nvSpPr>
-        <p:spPr>
-          <a:xfrm>
-            <a:off x="731520" y="1554480"/>
-            <a:ext cx="2057400" cy="4754880"/>
-          </a:xfrm>
-          <a:prstGeom prst="roundRect">
-            <a:avLst/>
-          </a:prstGeom>
-          <a:solidFill>
-            <a:srgbClr val="1E293B"/>
-          </a:solidFill>
-          <a:ln w="19050">
-            <a:solidFill>
-              <a:srgbClr val="10B981"/>
-            </a:solidFill>
-          </a:ln>
-        </p:spPr>
-        <p:style>
-          <a:lnRef idx="1">
-            <a:schemeClr val="accent1"/>
-          </a:lnRef>
-          <a:fillRef idx="3">
-            <a:schemeClr val="accent1"/>
-          </a:fillRef>
-          <a:effectRef idx="2">
-            <a:schemeClr val="accent1"/>
-          </a:effectRef>
-          <a:fontRef idx="minor">
-            <a:schemeClr val="lt1"/>
-          </a:fontRef>
-        </p:style>
-        <p:txBody>
-          <a:bodyPr rtlCol="0" anchor="ctr"/>
-          <a:lstStyle/>
-          <a:p>
-            <a:pPr algn="ctr"/>
-          </a:p>
-        </p:txBody>
-      </p:sp>
-      <p:sp>
-        <p:nvSpPr>
-          <p:cNvPr id="6" name="TextBox 5"/>
-          <p:cNvSpPr txBox="1"/>
-          <p:nvPr/>
-        </p:nvSpPr>
-        <p:spPr>
-          <a:xfrm>
-            <a:off x="868680" y="1737360"/>
-            <a:ext cx="1783080" cy="4389120"/>
-          </a:xfrm>
-          <a:prstGeom prst="rect">
-            <a:avLst/>
-          </a:prstGeom>
-          <a:noFill/>
-        </p:spPr>
-        <p:txBody>
-          <a:bodyPr wrap="square">
-            <a:spAutoFit/>
-          </a:bodyPr>
-          <a:lstStyle/>
-          <a:p>
-            <a:pPr>
-              <a:defRPr sz="1000" b="1">
-                <a:solidFill>
-                  <a:srgbClr val="94A3B8"/>
-                </a:solidFill>
-              </a:defRPr>
-            </a:pPr>
-            <a:r>
-              <a:t>1. AVOIDED ICU TRANSFERS</a:t>
-            </a:r>
-          </a:p>
-          <a:p>
-            <a:pPr>
-              <a:spcBef>
-                <a:spcPts val="800"/>
-              </a:spcBef>
-              <a:defRPr sz="2000" b="1">
-                <a:solidFill>
-                  <a:srgbClr val="10B981"/>
-                </a:solidFill>
-              </a:defRPr>
-            </a:pPr>
-            <a:r>
-              <a:t>+$1.39M</a:t>
-            </a:r>
-          </a:p>
-          <a:p>
-            <a:pPr>
-              <a:spcBef>
-                <a:spcPts val="800"/>
-              </a:spcBef>
-              <a:defRPr sz="1000">
-                <a:solidFill>
-                  <a:srgbClr val="FFFFFF"/>
-                </a:solidFill>
-              </a:defRPr>
-            </a:pPr>
-            <a:r>
-              <a:t>64% reduction in waiting room crashes (93 avoided ICU stays @ $15k).</a:t>
-            </a:r>
-          </a:p>
-        </p:txBody>
-      </p:sp>
-      <p:sp>
-        <p:nvSpPr>
-          <p:cNvPr id="7" name="Rounded Rectangle 6"/>
-          <p:cNvSpPr/>
-          <p:nvPr/>
-        </p:nvSpPr>
-        <p:spPr>
-          <a:xfrm>
-            <a:off x="2907791" y="1554480"/>
-            <a:ext cx="2057400" cy="4754880"/>
-          </a:xfrm>
-          <a:prstGeom prst="roundRect">
-            <a:avLst/>
-          </a:prstGeom>
-          <a:solidFill>
-            <a:srgbClr val="1E293B"/>
-          </a:solidFill>
-          <a:ln w="19050">
-            <a:solidFill>
-              <a:srgbClr val="0284C7"/>
-            </a:solidFill>
-          </a:ln>
-        </p:spPr>
-        <p:style>
-          <a:lnRef idx="1">
-            <a:schemeClr val="accent1"/>
-          </a:lnRef>
-          <a:fillRef idx="3">
-            <a:schemeClr val="accent1"/>
-          </a:fillRef>
-          <a:effectRef idx="2">
-            <a:schemeClr val="accent1"/>
-          </a:effectRef>
-          <a:fontRef idx="minor">
-            <a:schemeClr val="lt1"/>
-          </a:fontRef>
-        </p:style>
-        <p:txBody>
-          <a:bodyPr rtlCol="0" anchor="ctr"/>
-          <a:lstStyle/>
-          <a:p>
-            <a:pPr algn="ctr"/>
-          </a:p>
-        </p:txBody>
-      </p:sp>
-      <p:sp>
-        <p:nvSpPr>
-          <p:cNvPr id="8" name="TextBox 7"/>
-          <p:cNvSpPr txBox="1"/>
-          <p:nvPr/>
-        </p:nvSpPr>
-        <p:spPr>
-          <a:xfrm>
-            <a:off x="3044951" y="1737360"/>
-            <a:ext cx="1783080" cy="4389120"/>
-          </a:xfrm>
-          <a:prstGeom prst="rect">
-            <a:avLst/>
-          </a:prstGeom>
-          <a:noFill/>
-        </p:spPr>
-        <p:txBody>
-          <a:bodyPr wrap="square">
-            <a:spAutoFit/>
-          </a:bodyPr>
-          <a:lstStyle/>
-          <a:p>
-            <a:pPr>
-              <a:defRPr sz="1000" b="1">
-                <a:solidFill>
-                  <a:srgbClr val="94A3B8"/>
-                </a:solidFill>
-              </a:defRPr>
-            </a:pPr>
-            <a:r>
-              <a:t>2. LWBS REVENUE RECOVERY</a:t>
-            </a:r>
-          </a:p>
-          <a:p>
-            <a:pPr>
-              <a:spcBef>
-                <a:spcPts val="800"/>
-              </a:spcBef>
-              <a:defRPr sz="2000" b="1">
-                <a:solidFill>
-                  <a:srgbClr val="0284C7"/>
-                </a:solidFill>
-              </a:defRPr>
-            </a:pPr>
-            <a:r>
-              <a:t>+$1.12M</a:t>
-            </a:r>
-          </a:p>
-          <a:p>
-            <a:pPr>
-              <a:spcBef>
-                <a:spcPts val="800"/>
-              </a:spcBef>
-              <a:defRPr sz="1000">
-                <a:solidFill>
-                  <a:srgbClr val="FFFFFF"/>
-                </a:solidFill>
-              </a:defRPr>
-            </a:pPr>
-            <a:r>
-              <a:t>30% reduction in walkouts via Patient Companion (936 patients retained).</a:t>
-            </a:r>
-          </a:p>
-        </p:txBody>
-      </p:sp>
-      <p:sp>
-        <p:nvSpPr>
-          <p:cNvPr id="9" name="Rounded Rectangle 8"/>
-          <p:cNvSpPr/>
-          <p:nvPr/>
-        </p:nvSpPr>
-        <p:spPr>
-          <a:xfrm>
-            <a:off x="5084064" y="1554480"/>
-            <a:ext cx="2057400" cy="4754880"/>
-          </a:xfrm>
-          <a:prstGeom prst="roundRect">
-            <a:avLst/>
-          </a:prstGeom>
-          <a:solidFill>
-            <a:srgbClr val="1E293B"/>
-          </a:solidFill>
-          <a:ln w="19050">
-            <a:solidFill>
-              <a:srgbClr val="F59E0B"/>
-            </a:solidFill>
-          </a:ln>
-        </p:spPr>
-        <p:style>
-          <a:lnRef idx="1">
-            <a:schemeClr val="accent1"/>
-          </a:lnRef>
-          <a:fillRef idx="3">
-            <a:schemeClr val="accent1"/>
-          </a:fillRef>
-          <a:effectRef idx="2">
-            <a:schemeClr val="accent1"/>
-          </a:effectRef>
-          <a:fontRef idx="minor">
-            <a:schemeClr val="lt1"/>
-          </a:fontRef>
-        </p:style>
-        <p:txBody>
-          <a:bodyPr rtlCol="0" anchor="ctr"/>
-          <a:lstStyle/>
-          <a:p>
-            <a:pPr algn="ctr"/>
-          </a:p>
-        </p:txBody>
-      </p:sp>
-      <p:sp>
-        <p:nvSpPr>
-          <p:cNvPr id="10" name="TextBox 9"/>
-          <p:cNvSpPr txBox="1"/>
-          <p:nvPr/>
-        </p:nvSpPr>
-        <p:spPr>
-          <a:xfrm>
-            <a:off x="5221224" y="1737360"/>
-            <a:ext cx="1783080" cy="4389120"/>
-          </a:xfrm>
-          <a:prstGeom prst="rect">
-            <a:avLst/>
-          </a:prstGeom>
-          <a:noFill/>
-        </p:spPr>
-        <p:txBody>
-          <a:bodyPr wrap="square">
-            <a:spAutoFit/>
-          </a:bodyPr>
-          <a:lstStyle/>
-          <a:p>
-            <a:pPr>
-              <a:defRPr sz="1000" b="1">
-                <a:solidFill>
-                  <a:srgbClr val="94A3B8"/>
-                </a:solidFill>
-              </a:defRPr>
-            </a:pPr>
-            <a:r>
-              <a:t>3. DIAGNOSTIC PRE-ORDERS</a:t>
-            </a:r>
-          </a:p>
-          <a:p>
-            <a:pPr>
-              <a:spcBef>
-                <a:spcPts val="800"/>
-              </a:spcBef>
-              <a:defRPr sz="2000" b="1">
-                <a:solidFill>
-                  <a:srgbClr val="F59E0B"/>
-                </a:solidFill>
-              </a:defRPr>
-            </a:pPr>
-            <a:r>
-              <a:t>+$830k</a:t>
-            </a:r>
-          </a:p>
-          <a:p>
-            <a:pPr>
-              <a:spcBef>
-                <a:spcPts val="800"/>
-              </a:spcBef>
-              <a:defRPr sz="1000">
-                <a:solidFill>
-                  <a:srgbClr val="FFFFFF"/>
-                </a:solidFill>
-              </a:defRPr>
-            </a:pPr>
-            <a:r>
-              <a:t>18-min LOS reduction enables capacity for 660 additional admissions.</a:t>
-            </a:r>
-          </a:p>
-        </p:txBody>
-      </p:sp>
-      <p:sp>
-        <p:nvSpPr>
-          <p:cNvPr id="11" name="Rounded Rectangle 10"/>
-          <p:cNvSpPr/>
-          <p:nvPr/>
-        </p:nvSpPr>
-        <p:spPr>
-          <a:xfrm>
-            <a:off x="7260336" y="1554480"/>
-            <a:ext cx="2057400" cy="4754880"/>
-          </a:xfrm>
-          <a:prstGeom prst="roundRect">
-            <a:avLst/>
-          </a:prstGeom>
-          <a:solidFill>
-            <a:srgbClr val="1E293B"/>
-          </a:solidFill>
-          <a:ln w="19050">
-            <a:solidFill>
-              <a:srgbClr val="E11D48"/>
-            </a:solidFill>
-          </a:ln>
-        </p:spPr>
-        <p:style>
-          <a:lnRef idx="1">
-            <a:schemeClr val="accent1"/>
-          </a:lnRef>
-          <a:fillRef idx="3">
-            <a:schemeClr val="accent1"/>
-          </a:fillRef>
-          <a:effectRef idx="2">
-            <a:schemeClr val="accent1"/>
-          </a:effectRef>
-          <a:fontRef idx="minor">
-            <a:schemeClr val="lt1"/>
-          </a:fontRef>
-        </p:style>
-        <p:txBody>
-          <a:bodyPr rtlCol="0" anchor="ctr"/>
-          <a:lstStyle/>
-          <a:p>
-            <a:pPr algn="ctr"/>
-          </a:p>
-        </p:txBody>
-      </p:sp>
-      <p:sp>
-        <p:nvSpPr>
-          <p:cNvPr id="12" name="TextBox 11"/>
-          <p:cNvSpPr txBox="1"/>
-          <p:nvPr/>
-        </p:nvSpPr>
-        <p:spPr>
-          <a:xfrm>
-            <a:off x="7397496" y="1737360"/>
-            <a:ext cx="1783080" cy="4389120"/>
-          </a:xfrm>
-          <a:prstGeom prst="rect">
-            <a:avLst/>
-          </a:prstGeom>
-          <a:noFill/>
-        </p:spPr>
-        <p:txBody>
-          <a:bodyPr wrap="square">
-            <a:spAutoFit/>
-          </a:bodyPr>
-          <a:lstStyle/>
-          <a:p>
-            <a:pPr>
-              <a:defRPr sz="1000" b="1">
-                <a:solidFill>
-                  <a:srgbClr val="94A3B8"/>
-                </a:solidFill>
-              </a:defRPr>
-            </a:pPr>
-            <a:r>
-              <a:t>4. MALPRACTICE MITIGATION</a:t>
-            </a:r>
-          </a:p>
-          <a:p>
-            <a:pPr>
-              <a:spcBef>
-                <a:spcPts val="800"/>
-              </a:spcBef>
-              <a:defRPr sz="2000" b="1">
-                <a:solidFill>
-                  <a:srgbClr val="E11D48"/>
-                </a:solidFill>
-              </a:defRPr>
-            </a:pPr>
-            <a:r>
-              <a:t>+$480k</a:t>
-            </a:r>
-          </a:p>
-          <a:p>
-            <a:pPr>
-              <a:spcBef>
-                <a:spcPts val="800"/>
-              </a:spcBef>
-              <a:defRPr sz="1000">
-                <a:solidFill>
-                  <a:srgbClr val="FFFFFF"/>
-                </a:solidFill>
-              </a:defRPr>
-            </a:pPr>
-            <a:r>
-              <a:t>40% liability reduction via tamper-evident audit ledger defense.</a:t>
-            </a:r>
-          </a:p>
-        </p:txBody>
-      </p:sp>
-      <p:sp>
-        <p:nvSpPr>
-          <p:cNvPr id="13" name="Rounded Rectangle 12"/>
-          <p:cNvSpPr/>
-          <p:nvPr/>
-        </p:nvSpPr>
-        <p:spPr>
-          <a:xfrm>
-            <a:off x="9436608" y="1554480"/>
-            <a:ext cx="2057400" cy="4754880"/>
-          </a:xfrm>
-          <a:prstGeom prst="roundRect">
-            <a:avLst/>
-          </a:prstGeom>
-          <a:solidFill>
-            <a:srgbClr val="1E293B"/>
-          </a:solidFill>
-          <a:ln w="19050">
-            <a:solidFill>
-              <a:srgbClr val="10B981"/>
-            </a:solidFill>
-          </a:ln>
-        </p:spPr>
-        <p:style>
-          <a:lnRef idx="1">
-            <a:schemeClr val="accent1"/>
-          </a:lnRef>
-          <a:fillRef idx="3">
-            <a:schemeClr val="accent1"/>
-          </a:fillRef>
-          <a:effectRef idx="2">
-            <a:schemeClr val="accent1"/>
-          </a:effectRef>
-          <a:fontRef idx="minor">
-            <a:schemeClr val="lt1"/>
-          </a:fontRef>
-        </p:style>
-        <p:txBody>
-          <a:bodyPr rtlCol="0" anchor="ctr"/>
-          <a:lstStyle/>
-          <a:p>
-            <a:pPr algn="ctr"/>
-          </a:p>
-        </p:txBody>
-      </p:sp>
-      <p:sp>
-        <p:nvSpPr>
-          <p:cNvPr id="14" name="TextBox 13"/>
-          <p:cNvSpPr txBox="1"/>
-          <p:nvPr/>
-        </p:nvSpPr>
-        <p:spPr>
-          <a:xfrm>
-            <a:off x="9573768" y="1737360"/>
-            <a:ext cx="1783080" cy="4389120"/>
-          </a:xfrm>
-          <a:prstGeom prst="rect">
-            <a:avLst/>
-          </a:prstGeom>
-          <a:noFill/>
-        </p:spPr>
-        <p:txBody>
-          <a:bodyPr wrap="square">
-            <a:spAutoFit/>
-          </a:bodyPr>
-          <a:lstStyle/>
-          <a:p>
-            <a:pPr>
-              <a:defRPr sz="1000" b="1">
-                <a:solidFill>
-                  <a:srgbClr val="94A3B8"/>
-                </a:solidFill>
-              </a:defRPr>
-            </a:pPr>
-            <a:r>
-              <a:t>TOTAL NET ANNUAL ROI</a:t>
-            </a:r>
-          </a:p>
-          <a:p>
-            <a:pPr>
-              <a:spcBef>
-                <a:spcPts val="800"/>
-              </a:spcBef>
-              <a:defRPr sz="2000" b="1">
-                <a:solidFill>
-                  <a:srgbClr val="10B981"/>
-                </a:solidFill>
-              </a:defRPr>
-            </a:pPr>
-            <a:r>
-              <a:t>+$3.58M</a:t>
-            </a:r>
-          </a:p>
-          <a:p>
-            <a:pPr>
-              <a:spcBef>
-                <a:spcPts val="800"/>
-              </a:spcBef>
-              <a:defRPr sz="1000">
-                <a:solidFill>
-                  <a:srgbClr val="FFFFFF"/>
-                </a:solidFill>
-              </a:defRPr>
-            </a:pPr>
-            <a:r>
-              <a:t>Gross value $3.82M minus $240k enterprise license (14.9x Net ROI).</a:t>
-            </a:r>
-          </a:p>
-        </p:txBody>
-      </p:sp>
-    </p:spTree>
-  </p:cSld>
-  <p:clrMapOvr>
-    <a:masterClrMapping/>
-  </p:clrMapOvr>
-</p:sld>
-</file>
-
-<file path=ppt/slides/slide7.xml><?xml version="1.0" encoding="utf-8"?>
-<p:sld xmlns:a="http://schemas.openxmlformats.org/drawingml/2006/main" xmlns:p="http://schemas.openxmlformats.org/presentationml/2006/main" xmlns:r="http://schemas.openxmlformats.org/officeDocument/2006/relationships">
-  <p:cSld>
-    <p:spTree>
-      <p:nvGrpSpPr>
-        <p:cNvPr id="1" name=""/>
-        <p:cNvGrpSpPr/>
-        <p:nvPr/>
-      </p:nvGrpSpPr>
-      <p:grpSpPr/>
-      <p:sp>
-        <p:nvSpPr>
-          <p:cNvPr id="2" name="Rectangle 1"/>
-          <p:cNvSpPr/>
-          <p:nvPr/>
-        </p:nvSpPr>
-        <p:spPr>
-          <a:xfrm>
-            <a:off x="0" y="0"/>
-            <a:ext cx="12191695" cy="6858000"/>
-          </a:xfrm>
-          <a:prstGeom prst="rect">
-            <a:avLst/>
-          </a:prstGeom>
-          <a:solidFill>
-            <a:srgbClr val="0F172A"/>
-          </a:solidFill>
-          <a:ln>
-            <a:noFill/>
-          </a:ln>
-        </p:spPr>
-        <p:style>
-          <a:lnRef idx="1">
-            <a:schemeClr val="accent1"/>
-          </a:lnRef>
-          <a:fillRef idx="3">
-            <a:schemeClr val="accent1"/>
-          </a:fillRef>
-          <a:effectRef idx="2">
-            <a:schemeClr val="accent1"/>
-          </a:effectRef>
-          <a:fontRef idx="minor">
-            <a:schemeClr val="lt1"/>
-          </a:fontRef>
-        </p:style>
-        <p:txBody>
-          <a:bodyPr rtlCol="0" anchor="ctr"/>
-          <a:lstStyle/>
-          <a:p>
-            <a:pPr algn="ctr"/>
-          </a:p>
-        </p:txBody>
-      </p:sp>
-      <p:sp>
-        <p:nvSpPr>
-          <p:cNvPr id="3" name="TextBox 2"/>
-          <p:cNvSpPr txBox="1"/>
-          <p:nvPr/>
-        </p:nvSpPr>
-        <p:spPr>
-          <a:xfrm>
-            <a:off x="731520" y="457200"/>
-            <a:ext cx="10698480" cy="320040"/>
-          </a:xfrm>
-          <a:prstGeom prst="rect">
-            <a:avLst/>
-          </a:prstGeom>
-          <a:noFill/>
-        </p:spPr>
-        <p:txBody>
-          <a:bodyPr wrap="square">
-            <a:spAutoFit/>
-          </a:bodyPr>
-          <a:lstStyle/>
-          <a:p>
-            <a:pPr>
-              <a:defRPr sz="1000" b="1">
-                <a:solidFill>
-                  <a:srgbClr val="0284C7"/>
-                </a:solidFill>
-              </a:defRPr>
-            </a:pPr>
-            <a:r>
-              <a:t>ACCENTURE INNOVATION CHALLENGE 2026</a:t>
-            </a:r>
-          </a:p>
-        </p:txBody>
-      </p:sp>
-      <p:sp>
-        <p:nvSpPr>
-          <p:cNvPr id="4" name="TextBox 3"/>
-          <p:cNvSpPr txBox="1"/>
-          <p:nvPr/>
-        </p:nvSpPr>
-        <p:spPr>
-          <a:xfrm>
-            <a:off x="731520" y="731520"/>
-            <a:ext cx="10698480" cy="548640"/>
-          </a:xfrm>
-          <a:prstGeom prst="rect">
-            <a:avLst/>
-          </a:prstGeom>
-          <a:noFill/>
-        </p:spPr>
-        <p:txBody>
-          <a:bodyPr wrap="square">
-            <a:spAutoFit/>
-          </a:bodyPr>
-          <a:lstStyle/>
-          <a:p>
-            <a:pPr>
-              <a:defRPr sz="2200" b="1">
-                <a:solidFill>
-                  <a:srgbClr val="FFFFFF"/>
-                </a:solidFill>
-              </a:defRPr>
-            </a:pPr>
-            <a:r>
-              <a:t>Regulatory Compliance, Phased Roadmap &amp; Outro</a:t>
-            </a:r>
-          </a:p>
-        </p:txBody>
-      </p:sp>
-      <p:sp>
-        <p:nvSpPr>
-          <p:cNvPr id="5" name="Rounded Rectangle 4"/>
-          <p:cNvSpPr/>
-          <p:nvPr/>
-        </p:nvSpPr>
-        <p:spPr>
-          <a:xfrm>
-            <a:off x="731520" y="1554480"/>
-            <a:ext cx="5257800" cy="4754880"/>
-          </a:xfrm>
-          <a:prstGeom prst="roundRect">
-            <a:avLst/>
-          </a:prstGeom>
-          <a:solidFill>
-            <a:srgbClr val="1E293B"/>
-          </a:solidFill>
-          <a:ln w="19050">
-            <a:solidFill>
-              <a:srgbClr val="0284C7"/>
-            </a:solidFill>
-          </a:ln>
-        </p:spPr>
-        <p:style>
-          <a:lnRef idx="1">
-            <a:schemeClr val="accent1"/>
-          </a:lnRef>
-          <a:fillRef idx="3">
-            <a:schemeClr val="accent1"/>
-          </a:fillRef>
-          <a:effectRef idx="2">
-            <a:schemeClr val="accent1"/>
-          </a:effectRef>
-          <a:fontRef idx="minor">
-            <a:schemeClr val="lt1"/>
-          </a:fontRef>
-        </p:style>
-        <p:txBody>
-          <a:bodyPr rtlCol="0" anchor="ctr"/>
-          <a:lstStyle/>
-          <a:p>
-            <a:pPr algn="ctr"/>
-          </a:p>
-        </p:txBody>
-      </p:sp>
-      <p:sp>
-        <p:nvSpPr>
-          <p:cNvPr id="6" name="TextBox 5"/>
-          <p:cNvSpPr txBox="1"/>
-          <p:nvPr/>
-        </p:nvSpPr>
-        <p:spPr>
-          <a:xfrm>
-            <a:off x="914400" y="1737360"/>
-            <a:ext cx="4892040" cy="4389120"/>
-          </a:xfrm>
-          <a:prstGeom prst="rect">
-            <a:avLst/>
-          </a:prstGeom>
-          <a:noFill/>
-        </p:spPr>
-        <p:txBody>
-          <a:bodyPr wrap="square">
-            <a:spAutoFit/>
-          </a:bodyPr>
-          <a:lstStyle/>
-          <a:p>
-            <a:pPr>
-              <a:defRPr sz="1400" b="1">
-                <a:solidFill>
-                  <a:srgbClr val="0284C7"/>
-                </a:solidFill>
-              </a:defRPr>
-            </a:pPr>
-            <a:r>
-              <a:t>REGULATORY &amp; ARCHITECTURE COMPLIANCE</a:t>
-            </a:r>
-          </a:p>
-          <a:p>
-            <a:pPr>
-              <a:spcBef>
-                <a:spcPts val="800"/>
-              </a:spcBef>
-              <a:defRPr sz="1050" b="1">
-                <a:solidFill>
-                  <a:srgbClr val="FFFFFF"/>
-                </a:solidFill>
-              </a:defRPr>
-            </a:pPr>
-            <a:r>
-              <a:t>• FDA Non-Device CDS (21 U.S.C. § 360aaa-1): </a:t>
-            </a:r>
-          </a:p>
-          <a:p>
-            <a:pPr>
-              <a:defRPr sz="950">
-                <a:solidFill>
-                  <a:srgbClr val="94A3B8"/>
-                </a:solidFill>
-              </a:defRPr>
-            </a:pPr>
-            <a:r>
-              <a:t>  Transparent rationales &amp; trajectories; clinicians maintain 100% final override authority.</a:t>
-            </a:r>
-          </a:p>
-          <a:p>
-            <a:pPr>
-              <a:spcBef>
-                <a:spcPts val="800"/>
-              </a:spcBef>
-              <a:defRPr sz="1050" b="1">
-                <a:solidFill>
-                  <a:srgbClr val="FFFFFF"/>
-                </a:solidFill>
-              </a:defRPr>
-            </a:pPr>
-            <a:r>
-              <a:t>• Air-Gapped Edge Deployment: </a:t>
-            </a:r>
-          </a:p>
-          <a:p>
-            <a:pPr>
-              <a:defRPr sz="950">
-                <a:solidFill>
-                  <a:srgbClr val="94A3B8"/>
-                </a:solidFill>
-              </a:defRPr>
-            </a:pPr>
-            <a:r>
-              <a:t>  Zero PHI leaves hospital network; sub-15ms inference latency on local server.</a:t>
-            </a:r>
-          </a:p>
-          <a:p>
-            <a:pPr>
-              <a:spcBef>
-                <a:spcPts val="800"/>
-              </a:spcBef>
-              <a:defRPr sz="1050" b="1">
-                <a:solidFill>
-                  <a:srgbClr val="FFFFFF"/>
-                </a:solidFill>
-              </a:defRPr>
-            </a:pPr>
-            <a:r>
-              <a:t>• Immutable Audit Ledger: </a:t>
-            </a:r>
-          </a:p>
-          <a:p>
-            <a:pPr>
-              <a:defRPr sz="950">
-                <a:solidFill>
-                  <a:srgbClr val="94A3B8"/>
-                </a:solidFill>
-              </a:defRPr>
-            </a:pPr>
-            <a:r>
-              <a:t>  Cryptographically verifiable tamper-evident SQLite WAL logging for all clinical actions.</a:t>
-            </a:r>
-          </a:p>
-          <a:p>
-            <a:pPr>
-              <a:spcBef>
-                <a:spcPts val="800"/>
-              </a:spcBef>
-              <a:defRPr sz="1050" b="1">
-                <a:solidFill>
-                  <a:srgbClr val="FFFFFF"/>
-                </a:solidFill>
-              </a:defRPr>
-            </a:pPr>
-            <a:r>
-              <a:t>• Test Verification: </a:t>
-            </a:r>
-          </a:p>
-          <a:p>
-            <a:pPr>
-              <a:defRPr sz="950">
-                <a:solidFill>
-                  <a:srgbClr val="94A3B8"/>
-                </a:solidFill>
-              </a:defRPr>
-            </a:pPr>
-            <a:r>
-              <a:t>  51/51 automated pytest tests passed (100% pass rate).</a:t>
-            </a:r>
-          </a:p>
-        </p:txBody>
-      </p:sp>
-      <p:sp>
-        <p:nvSpPr>
-          <p:cNvPr id="7" name="Rounded Rectangle 6"/>
-          <p:cNvSpPr/>
-          <p:nvPr/>
-        </p:nvSpPr>
-        <p:spPr>
-          <a:xfrm>
-            <a:off x="6199632" y="1554480"/>
-            <a:ext cx="5257800" cy="4754880"/>
-          </a:xfrm>
-          <a:prstGeom prst="roundRect">
-            <a:avLst/>
-          </a:prstGeom>
-          <a:solidFill>
-            <a:srgbClr val="1E293B"/>
-          </a:solidFill>
-          <a:ln w="19050">
-            <a:solidFill>
-              <a:srgbClr val="10B981"/>
-            </a:solidFill>
-          </a:ln>
-        </p:spPr>
-        <p:style>
-          <a:lnRef idx="1">
-            <a:schemeClr val="accent1"/>
-          </a:lnRef>
-          <a:fillRef idx="3">
-            <a:schemeClr val="accent1"/>
-          </a:fillRef>
-          <a:effectRef idx="2">
-            <a:schemeClr val="accent1"/>
-          </a:effectRef>
-          <a:fontRef idx="minor">
-            <a:schemeClr val="lt1"/>
-          </a:fontRef>
-        </p:style>
-        <p:txBody>
-          <a:bodyPr rtlCol="0" anchor="ctr"/>
-          <a:lstStyle/>
-          <a:p>
-            <a:pPr algn="ctr"/>
-          </a:p>
-        </p:txBody>
-      </p:sp>
-      <p:sp>
-        <p:nvSpPr>
-          <p:cNvPr id="8" name="TextBox 7"/>
-          <p:cNvSpPr txBox="1"/>
-          <p:nvPr/>
-        </p:nvSpPr>
-        <p:spPr>
-          <a:xfrm>
-            <a:off x="6400800" y="1737360"/>
-            <a:ext cx="4892040" cy="4389120"/>
-          </a:xfrm>
-          <a:prstGeom prst="rect">
-            <a:avLst/>
-          </a:prstGeom>
-          <a:noFill/>
-        </p:spPr>
-        <p:txBody>
-          <a:bodyPr wrap="square">
-            <a:spAutoFit/>
-          </a:bodyPr>
-          <a:lstStyle/>
-          <a:p>
-            <a:pPr>
-              <a:defRPr sz="1400" b="1">
-                <a:solidFill>
-                  <a:srgbClr val="10B981"/>
-                </a:solidFill>
-              </a:defRPr>
-            </a:pPr>
-            <a:r>
-              <a:t>PHASED 12-MONTH EXECUTION ROADMAP</a:t>
-            </a:r>
-          </a:p>
-          <a:p>
-            <a:pPr>
-              <a:spcBef>
-                <a:spcPts val="800"/>
-              </a:spcBef>
-              <a:defRPr sz="1050" b="1">
-                <a:solidFill>
-                  <a:srgbClr val="FFFFFF"/>
-                </a:solidFill>
-              </a:defRPr>
-            </a:pPr>
-            <a:r>
-              <a:t>• Phase 1 (Months 1–3) — Edge Pilot</a:t>
-            </a:r>
-          </a:p>
-          <a:p>
-            <a:pPr>
-              <a:defRPr sz="950">
-                <a:solidFill>
-                  <a:srgbClr val="94A3B8"/>
-                </a:solidFill>
-              </a:defRPr>
-            </a:pPr>
-            <a:r>
-              <a:t>  Deploy contactless camera testbed in 2 triage bays; benchmark sensitivity across 51 test suites.</a:t>
-            </a:r>
-          </a:p>
-          <a:p>
-            <a:pPr>
-              <a:spcBef>
-                <a:spcPts val="800"/>
-              </a:spcBef>
-              <a:defRPr sz="1050" b="1">
-                <a:solidFill>
-                  <a:srgbClr val="FFFFFF"/>
-                </a:solidFill>
-              </a:defRPr>
-            </a:pPr>
-            <a:r>
-              <a:t>• Phase 2 (Months 4–6) — Shadow Surveillance</a:t>
-            </a:r>
-          </a:p>
-          <a:p>
-            <a:pPr>
-              <a:defRPr sz="950">
-                <a:solidFill>
-                  <a:srgbClr val="94A3B8"/>
-                </a:solidFill>
-              </a:defRPr>
-            </a:pPr>
-            <a:r>
-              <a:t>  Integrate HL7 FHIR stream &amp; 108 EMS pre-arrival telemetry; evaluate concordance alongside Epic/Cerner.</a:t>
-            </a:r>
-          </a:p>
-          <a:p>
-            <a:pPr>
-              <a:spcBef>
-                <a:spcPts val="800"/>
-              </a:spcBef>
-              <a:defRPr sz="1050" b="1">
-                <a:solidFill>
-                  <a:srgbClr val="FFFFFF"/>
-                </a:solidFill>
-              </a:defRPr>
-            </a:pPr>
-            <a:r>
-              <a:t>• Phase 3 (Months 7–9) — Active Cockpit</a:t>
-            </a:r>
-          </a:p>
-          <a:p>
-            <a:pPr>
-              <a:defRPr sz="950">
-                <a:solidFill>
-                  <a:srgbClr val="94A3B8"/>
-                </a:solidFill>
-              </a:defRPr>
-            </a:pPr>
-            <a:r>
-              <a:t>  Launch Nurse Tasks ('Next 5 Mins') and Standing Pre-Orders with charge nurse feedback.</a:t>
-            </a:r>
-          </a:p>
-          <a:p>
-            <a:pPr>
-              <a:spcBef>
-                <a:spcPts val="800"/>
-              </a:spcBef>
-              <a:defRPr sz="1050" b="1">
-                <a:solidFill>
-                  <a:srgbClr val="FFFFFF"/>
-                </a:solidFill>
-              </a:defRPr>
-            </a:pPr>
-            <a:r>
-              <a:t>• Phase 4 (Months 10–12) — Enterprise Scaling</a:t>
-            </a:r>
-          </a:p>
-          <a:p>
-            <a:pPr>
-              <a:defRPr sz="950">
-                <a:solidFill>
-                  <a:srgbClr val="94A3B8"/>
-                </a:solidFill>
-              </a:defRPr>
-            </a:pPr>
-            <a:r>
-              <a:t>  Roll out Patient Companion QR portal &amp; Referral Diversion across 3 regional hospital networks.</a:t>
+              <a:t>GitHub Repository: https://github.com/freya1705/PatientTriageAI</a:t>
             </a:r>
           </a:p>
         </p:txBody>
